--- a/Presentation [Autosaved].pptx
+++ b/Presentation [Autosaved].pptx
@@ -23,8 +23,7 @@
     <p:sldId id="273" r:id="rId17"/>
     <p:sldId id="269" r:id="rId18"/>
     <p:sldId id="270" r:id="rId19"/>
-    <p:sldId id="271" r:id="rId20"/>
-    <p:sldId id="256" r:id="rId21"/>
+    <p:sldId id="276" r:id="rId20"/>
   </p:sldIdLst>
   <p:sldSz cx="12192000" cy="6858000"/>
   <p:notesSz cx="6858000" cy="9144000"/>
@@ -7504,13 +7503,7 @@
   <p:cSld>
     <p:spTree>
       <p:nvGrpSpPr>
-        <p:cNvPr id="1" name="">
-          <a:extLst>
-            <a:ext uri="{FF2B5EF4-FFF2-40B4-BE49-F238E27FC236}">
-              <a16:creationId xmlns:a16="http://schemas.microsoft.com/office/drawing/2014/main" id="{88C872A4-B622-A952-0CA9-79B34AB35BCF}"/>
-            </a:ext>
-          </a:extLst>
-        </p:cNvPr>
+        <p:cNvPr id="1" name=""/>
         <p:cNvGrpSpPr/>
         <p:nvPr/>
       </p:nvGrpSpPr>
@@ -7522,10 +7515,63 @@
           <a:chExt cx="0" cy="0"/>
         </a:xfrm>
       </p:grpSpPr>
+      <p:sp>
+        <p:nvSpPr>
+          <p:cNvPr id="2" name="TextBox 1">
+            <a:extLst>
+              <a:ext uri="{FF2B5EF4-FFF2-40B4-BE49-F238E27FC236}">
+                <a16:creationId xmlns:a16="http://schemas.microsoft.com/office/drawing/2014/main" id="{1A177B93-E205-254A-5C87-22E749C2CEB5}"/>
+              </a:ext>
+            </a:extLst>
+          </p:cNvPr>
+          <p:cNvSpPr txBox="1"/>
+          <p:nvPr/>
+        </p:nvSpPr>
+        <p:spPr>
+          <a:xfrm>
+            <a:off x="4732107" y="3044279"/>
+            <a:ext cx="2727785" cy="769441"/>
+          </a:xfrm>
+          <a:prstGeom prst="rect">
+            <a:avLst/>
+          </a:prstGeom>
+          <a:noFill/>
+        </p:spPr>
+        <p:txBody>
+          <a:bodyPr wrap="square">
+            <a:spAutoFit/>
+          </a:bodyPr>
+          <a:lstStyle/>
+          <a:p>
+            <a:pPr algn="l">
+              <a:spcAft>
+                <a:spcPts val="2250"/>
+              </a:spcAft>
+              <a:buNone/>
+            </a:pPr>
+            <a:r>
+              <a:rPr lang="en-US" sz="4400" b="1" dirty="0">
+                <a:solidFill>
+                  <a:srgbClr val="764BA2"/>
+                </a:solidFill>
+                <a:latin typeface="Segoe UI" panose="020B0502040204020203" pitchFamily="34" charset="0"/>
+              </a:rPr>
+              <a:t>Code Run</a:t>
+            </a:r>
+            <a:endParaRPr lang="en-US" sz="4400" b="1" i="0" dirty="0">
+              <a:solidFill>
+                <a:srgbClr val="764BA2"/>
+              </a:solidFill>
+              <a:effectLst/>
+              <a:latin typeface="Segoe UI" panose="020B0502040204020203" pitchFamily="34" charset="0"/>
+            </a:endParaRPr>
+          </a:p>
+        </p:txBody>
+      </p:sp>
     </p:spTree>
     <p:extLst>
       <p:ext uri="{BB962C8B-B14F-4D97-AF65-F5344CB8AC3E}">
-        <p14:creationId xmlns:p14="http://schemas.microsoft.com/office/powerpoint/2010/main" val="380641581"/>
+        <p14:creationId xmlns:p14="http://schemas.microsoft.com/office/powerpoint/2010/main" val="2167589799"/>
       </p:ext>
     </p:extLst>
   </p:cSld>
@@ -7929,72 +7975,6 @@
     <p:extLst>
       <p:ext uri="{BB962C8B-B14F-4D97-AF65-F5344CB8AC3E}">
         <p14:creationId xmlns:p14="http://schemas.microsoft.com/office/powerpoint/2010/main" val="1972251204"/>
-      </p:ext>
-    </p:extLst>
-  </p:cSld>
-  <p:clrMapOvr>
-    <a:masterClrMapping/>
-  </p:clrMapOvr>
-</p:sld>
-</file>
-
-<file path=ppt/slides/slide20.xml><?xml version="1.0" encoding="utf-8"?>
-<p:sld xmlns:a="http://schemas.openxmlformats.org/drawingml/2006/main" xmlns:r="http://schemas.openxmlformats.org/officeDocument/2006/relationships" xmlns:p="http://schemas.openxmlformats.org/presentationml/2006/main">
-  <p:cSld>
-    <p:spTree>
-      <p:nvGrpSpPr>
-        <p:cNvPr id="1" name=""/>
-        <p:cNvGrpSpPr/>
-        <p:nvPr/>
-      </p:nvGrpSpPr>
-      <p:grpSpPr>
-        <a:xfrm>
-          <a:off x="0" y="0"/>
-          <a:ext cx="0" cy="0"/>
-          <a:chOff x="0" y="0"/>
-          <a:chExt cx="0" cy="0"/>
-        </a:xfrm>
-      </p:grpSpPr>
-      <p:pic>
-        <p:nvPicPr>
-          <p:cNvPr id="5" name="Picture 4" descr="A computer screen shot of a computer&#10;&#10;AI-generated content may be incorrect.">
-            <a:extLst>
-              <a:ext uri="{FF2B5EF4-FFF2-40B4-BE49-F238E27FC236}">
-                <a16:creationId xmlns:a16="http://schemas.microsoft.com/office/drawing/2014/main" id="{501CE383-BE7D-E7F3-1D26-CA71A2A11B9D}"/>
-              </a:ext>
-            </a:extLst>
-          </p:cNvPr>
-          <p:cNvPicPr>
-            <a:picLocks noChangeAspect="1"/>
-          </p:cNvPicPr>
-          <p:nvPr/>
-        </p:nvPicPr>
-        <p:blipFill>
-          <a:blip r:embed="rId2">
-            <a:extLst>
-              <a:ext uri="{28A0092B-C50C-407E-A947-70E740481C1C}">
-                <a14:useLocalDpi xmlns:a14="http://schemas.microsoft.com/office/drawing/2010/main" val="0"/>
-              </a:ext>
-            </a:extLst>
-          </a:blip>
-          <a:stretch>
-            <a:fillRect/>
-          </a:stretch>
-        </p:blipFill>
-        <p:spPr>
-          <a:xfrm>
-            <a:off x="1784909" y="275848"/>
-            <a:ext cx="8705088" cy="6582151"/>
-          </a:xfrm>
-          <a:prstGeom prst="rect">
-            <a:avLst/>
-          </a:prstGeom>
-        </p:spPr>
-      </p:pic>
-    </p:spTree>
-    <p:extLst>
-      <p:ext uri="{BB962C8B-B14F-4D97-AF65-F5344CB8AC3E}">
-        <p14:creationId xmlns:p14="http://schemas.microsoft.com/office/powerpoint/2010/main" val="47551444"/>
       </p:ext>
     </p:extLst>
   </p:cSld>

--- a/Presentation [Autosaved].pptx
+++ b/Presentation [Autosaved].pptx
@@ -12,18 +12,16 @@
     <p:sldId id="260" r:id="rId6"/>
     <p:sldId id="272" r:id="rId7"/>
     <p:sldId id="261" r:id="rId8"/>
-    <p:sldId id="275" r:id="rId9"/>
+    <p:sldId id="273" r:id="rId9"/>
     <p:sldId id="262" r:id="rId10"/>
     <p:sldId id="263" r:id="rId11"/>
     <p:sldId id="264" r:id="rId12"/>
     <p:sldId id="265" r:id="rId13"/>
-    <p:sldId id="266" r:id="rId14"/>
-    <p:sldId id="267" r:id="rId15"/>
-    <p:sldId id="268" r:id="rId16"/>
-    <p:sldId id="273" r:id="rId17"/>
-    <p:sldId id="269" r:id="rId18"/>
-    <p:sldId id="270" r:id="rId19"/>
-    <p:sldId id="276" r:id="rId20"/>
+    <p:sldId id="268" r:id="rId14"/>
+    <p:sldId id="269" r:id="rId15"/>
+    <p:sldId id="270" r:id="rId16"/>
+    <p:sldId id="277" r:id="rId17"/>
+    <p:sldId id="276" r:id="rId18"/>
   </p:sldIdLst>
   <p:sldSz cx="12192000" cy="6858000"/>
   <p:notesSz cx="6858000" cy="9144000"/>
@@ -5704,7 +5702,7 @@
         <p:cNvPr id="1" name="">
           <a:extLst>
             <a:ext uri="{FF2B5EF4-FFF2-40B4-BE49-F238E27FC236}">
-              <a16:creationId xmlns:a16="http://schemas.microsoft.com/office/drawing/2014/main" id="{1711AAAE-C364-056F-59EA-F0CA5AFD0577}"/>
+              <a16:creationId xmlns:a16="http://schemas.microsoft.com/office/drawing/2014/main" id="{F8F7004D-5AE3-A2C7-9EC7-49A80916B105}"/>
             </a:ext>
           </a:extLst>
         </p:cNvPr>
@@ -5724,7 +5722,7 @@
           <p:cNvPr id="3" name="TextBox 2">
             <a:extLst>
               <a:ext uri="{FF2B5EF4-FFF2-40B4-BE49-F238E27FC236}">
-                <a16:creationId xmlns:a16="http://schemas.microsoft.com/office/drawing/2014/main" id="{6F7FAF31-4FD4-B087-9F73-8D7DE84004B2}"/>
+                <a16:creationId xmlns:a16="http://schemas.microsoft.com/office/drawing/2014/main" id="{AF250135-F046-6EF3-2729-7F8101DD5911}"/>
               </a:ext>
             </a:extLst>
           </p:cNvPr>
@@ -5733,7 +5731,7 @@
         </p:nvSpPr>
         <p:spPr>
           <a:xfrm>
-            <a:off x="500826" y="356296"/>
+            <a:off x="521766" y="328375"/>
             <a:ext cx="6097162" cy="369332"/>
           </a:xfrm>
           <a:prstGeom prst="rect">
@@ -5761,7 +5759,7 @@
                 <a:effectLst/>
                 <a:latin typeface="Segoe UI" panose="020B0502040204020203" pitchFamily="34" charset="0"/>
               </a:rPr>
-              <a:t>Why TF-IDF Fails in Multilingual Settings 💔</a:t>
+              <a:t>Next Phase: Multilingual Transformers 🚀</a:t>
             </a:r>
           </a:p>
         </p:txBody>
@@ -5771,7 +5769,7 @@
           <p:cNvPr id="5" name="TextBox 4">
             <a:extLst>
               <a:ext uri="{FF2B5EF4-FFF2-40B4-BE49-F238E27FC236}">
-                <a16:creationId xmlns:a16="http://schemas.microsoft.com/office/drawing/2014/main" id="{C8A38BE8-79E7-1FFB-5539-32703A5F9821}"/>
+                <a16:creationId xmlns:a16="http://schemas.microsoft.com/office/drawing/2014/main" id="{4945AFA3-C61F-29AC-3C9B-EE684A47F44E}"/>
               </a:ext>
             </a:extLst>
           </p:cNvPr>
@@ -5780,8 +5778,440 @@
         </p:nvSpPr>
         <p:spPr>
           <a:xfrm>
-            <a:off x="1683671" y="1089272"/>
-            <a:ext cx="8824657" cy="4549964"/>
+            <a:off x="654389" y="1655949"/>
+            <a:ext cx="4894832" cy="3164969"/>
+          </a:xfrm>
+          <a:prstGeom prst="rect">
+            <a:avLst/>
+          </a:prstGeom>
+          <a:noFill/>
+          <a:ln>
+            <a:solidFill>
+              <a:schemeClr val="tx1"/>
+            </a:solidFill>
+          </a:ln>
+        </p:spPr>
+        <p:txBody>
+          <a:bodyPr wrap="square">
+            <a:spAutoFit/>
+          </a:bodyPr>
+          <a:lstStyle/>
+          <a:p>
+            <a:pPr algn="l">
+              <a:spcBef>
+                <a:spcPts val="1500"/>
+              </a:spcBef>
+              <a:spcAft>
+                <a:spcPts val="1125"/>
+              </a:spcAft>
+              <a:buNone/>
+            </a:pPr>
+            <a:r>
+              <a:rPr lang="en-US" b="1" i="0" dirty="0">
+                <a:solidFill>
+                  <a:srgbClr val="667EEA"/>
+                </a:solidFill>
+                <a:effectLst/>
+                <a:latin typeface="Segoe UI" panose="020B0502040204020203" pitchFamily="34" charset="0"/>
+              </a:rPr>
+              <a:t>Why XLM-R?</a:t>
+            </a:r>
+          </a:p>
+          <a:p>
+            <a:pPr algn="l">
+              <a:spcBef>
+                <a:spcPts val="1125"/>
+              </a:spcBef>
+              <a:spcAft>
+                <a:spcPts val="1125"/>
+              </a:spcAft>
+              <a:buFont typeface="Arial" panose="020B0604020202020204" pitchFamily="34" charset="0"/>
+              <a:buChar char="•"/>
+            </a:pPr>
+            <a:r>
+              <a:rPr lang="en-US" b="0" i="0" dirty="0">
+                <a:solidFill>
+                  <a:srgbClr val="000000"/>
+                </a:solidFill>
+                <a:effectLst/>
+                <a:latin typeface="Segoe UI" panose="020B0502040204020203" pitchFamily="34" charset="0"/>
+              </a:rPr>
+              <a:t>Pre-trained on 100 languages</a:t>
+            </a:r>
+          </a:p>
+          <a:p>
+            <a:pPr algn="l">
+              <a:spcBef>
+                <a:spcPts val="1125"/>
+              </a:spcBef>
+              <a:spcAft>
+                <a:spcPts val="1125"/>
+              </a:spcAft>
+              <a:buFont typeface="Arial" panose="020B0604020202020204" pitchFamily="34" charset="0"/>
+              <a:buChar char="•"/>
+            </a:pPr>
+            <a:r>
+              <a:rPr lang="en-US" b="0" i="0" dirty="0">
+                <a:solidFill>
+                  <a:srgbClr val="000000"/>
+                </a:solidFill>
+                <a:effectLst/>
+                <a:latin typeface="Segoe UI" panose="020B0502040204020203" pitchFamily="34" charset="0"/>
+              </a:rPr>
+              <a:t>Shares </a:t>
+            </a:r>
+            <a:r>
+              <a:rPr lang="en-US" b="0" i="0" dirty="0" err="1">
+                <a:solidFill>
+                  <a:srgbClr val="000000"/>
+                </a:solidFill>
+                <a:effectLst/>
+                <a:latin typeface="Segoe UI" panose="020B0502040204020203" pitchFamily="34" charset="0"/>
+              </a:rPr>
+              <a:t>subword</a:t>
+            </a:r>
+            <a:r>
+              <a:rPr lang="en-US" b="0" i="0" dirty="0">
+                <a:solidFill>
+                  <a:srgbClr val="000000"/>
+                </a:solidFill>
+                <a:effectLst/>
+                <a:latin typeface="Segoe UI" panose="020B0502040204020203" pitchFamily="34" charset="0"/>
+              </a:rPr>
+              <a:t> representations across scripts</a:t>
+            </a:r>
+          </a:p>
+          <a:p>
+            <a:pPr algn="l">
+              <a:spcBef>
+                <a:spcPts val="1125"/>
+              </a:spcBef>
+              <a:spcAft>
+                <a:spcPts val="1125"/>
+              </a:spcAft>
+              <a:buFont typeface="Arial" panose="020B0604020202020204" pitchFamily="34" charset="0"/>
+              <a:buChar char="•"/>
+            </a:pPr>
+            <a:r>
+              <a:rPr lang="en-US" b="0" i="0" dirty="0">
+                <a:solidFill>
+                  <a:srgbClr val="000000"/>
+                </a:solidFill>
+                <a:effectLst/>
+                <a:latin typeface="Segoe UI" panose="020B0502040204020203" pitchFamily="34" charset="0"/>
+              </a:rPr>
+              <a:t>Handles code-mixing naturally</a:t>
+            </a:r>
+          </a:p>
+          <a:p>
+            <a:pPr algn="l">
+              <a:spcBef>
+                <a:spcPts val="1125"/>
+              </a:spcBef>
+              <a:spcAft>
+                <a:spcPts val="1125"/>
+              </a:spcAft>
+              <a:buFont typeface="Arial" panose="020B0604020202020204" pitchFamily="34" charset="0"/>
+              <a:buChar char="•"/>
+            </a:pPr>
+            <a:r>
+              <a:rPr lang="en-US" b="0" i="0" dirty="0">
+                <a:solidFill>
+                  <a:srgbClr val="000000"/>
+                </a:solidFill>
+                <a:effectLst/>
+                <a:latin typeface="Segoe UI" panose="020B0502040204020203" pitchFamily="34" charset="0"/>
+              </a:rPr>
+              <a:t>Captures long-range dependencies</a:t>
+            </a:r>
+          </a:p>
+          <a:p>
+            <a:pPr algn="l">
+              <a:spcBef>
+                <a:spcPts val="1125"/>
+              </a:spcBef>
+              <a:spcAft>
+                <a:spcPts val="1125"/>
+              </a:spcAft>
+              <a:buFont typeface="Arial" panose="020B0604020202020204" pitchFamily="34" charset="0"/>
+              <a:buChar char="•"/>
+            </a:pPr>
+            <a:r>
+              <a:rPr lang="en-US" b="0" i="0" dirty="0">
+                <a:solidFill>
+                  <a:srgbClr val="000000"/>
+                </a:solidFill>
+                <a:effectLst/>
+                <a:latin typeface="Segoe UI" panose="020B0502040204020203" pitchFamily="34" charset="0"/>
+              </a:rPr>
+              <a:t>Understands context &amp; semantics</a:t>
+            </a:r>
+          </a:p>
+        </p:txBody>
+      </p:sp>
+      <p:sp>
+        <p:nvSpPr>
+          <p:cNvPr id="7" name="TextBox 6">
+            <a:extLst>
+              <a:ext uri="{FF2B5EF4-FFF2-40B4-BE49-F238E27FC236}">
+                <a16:creationId xmlns:a16="http://schemas.microsoft.com/office/drawing/2014/main" id="{05693769-BBBC-6C42-6D51-D90D808A75DF}"/>
+              </a:ext>
+            </a:extLst>
+          </p:cNvPr>
+          <p:cNvSpPr txBox="1"/>
+          <p:nvPr/>
+        </p:nvSpPr>
+        <p:spPr>
+          <a:xfrm>
+            <a:off x="6096000" y="1655949"/>
+            <a:ext cx="5264780" cy="3724096"/>
+          </a:xfrm>
+          <a:prstGeom prst="rect">
+            <a:avLst/>
+          </a:prstGeom>
+          <a:noFill/>
+          <a:ln>
+            <a:solidFill>
+              <a:schemeClr val="tx1"/>
+            </a:solidFill>
+          </a:ln>
+        </p:spPr>
+        <p:txBody>
+          <a:bodyPr wrap="square">
+            <a:spAutoFit/>
+          </a:bodyPr>
+          <a:lstStyle/>
+          <a:p>
+            <a:pPr algn="l">
+              <a:spcBef>
+                <a:spcPts val="1500"/>
+              </a:spcBef>
+              <a:spcAft>
+                <a:spcPts val="1125"/>
+              </a:spcAft>
+              <a:buNone/>
+            </a:pPr>
+            <a:r>
+              <a:rPr lang="en-US" b="1" i="0" dirty="0">
+                <a:solidFill>
+                  <a:srgbClr val="667EEA"/>
+                </a:solidFill>
+                <a:effectLst/>
+                <a:latin typeface="Segoe UI" panose="020B0502040204020203" pitchFamily="34" charset="0"/>
+              </a:rPr>
+              <a:t>Implementation Plan</a:t>
+            </a:r>
+          </a:p>
+          <a:p>
+            <a:pPr algn="l">
+              <a:spcBef>
+                <a:spcPts val="1125"/>
+              </a:spcBef>
+              <a:spcAft>
+                <a:spcPts val="1125"/>
+              </a:spcAft>
+              <a:buFont typeface="Arial" panose="020B0604020202020204" pitchFamily="34" charset="0"/>
+              <a:buChar char="•"/>
+            </a:pPr>
+            <a:r>
+              <a:rPr lang="en-US" b="0" i="0" dirty="0">
+                <a:solidFill>
+                  <a:srgbClr val="000000"/>
+                </a:solidFill>
+                <a:effectLst/>
+                <a:latin typeface="Segoe UI" panose="020B0502040204020203" pitchFamily="34" charset="0"/>
+              </a:rPr>
+              <a:t>Model: </a:t>
+            </a:r>
+            <a:r>
+              <a:rPr lang="en-US" b="0" i="0" dirty="0" err="1">
+                <a:solidFill>
+                  <a:srgbClr val="000000"/>
+                </a:solidFill>
+                <a:effectLst/>
+                <a:latin typeface="Segoe UI" panose="020B0502040204020203" pitchFamily="34" charset="0"/>
+              </a:rPr>
+              <a:t>xlm</a:t>
+            </a:r>
+            <a:r>
+              <a:rPr lang="en-US" b="0" i="0" dirty="0">
+                <a:solidFill>
+                  <a:srgbClr val="000000"/>
+                </a:solidFill>
+                <a:effectLst/>
+                <a:latin typeface="Segoe UI" panose="020B0502040204020203" pitchFamily="34" charset="0"/>
+              </a:rPr>
+              <a:t>-</a:t>
+            </a:r>
+            <a:r>
+              <a:rPr lang="en-US" b="0" i="0" dirty="0" err="1">
+                <a:solidFill>
+                  <a:srgbClr val="000000"/>
+                </a:solidFill>
+                <a:effectLst/>
+                <a:latin typeface="Segoe UI" panose="020B0502040204020203" pitchFamily="34" charset="0"/>
+              </a:rPr>
+              <a:t>roberta</a:t>
+            </a:r>
+            <a:r>
+              <a:rPr lang="en-US" b="0" i="0" dirty="0">
+                <a:solidFill>
+                  <a:srgbClr val="000000"/>
+                </a:solidFill>
+                <a:effectLst/>
+                <a:latin typeface="Segoe UI" panose="020B0502040204020203" pitchFamily="34" charset="0"/>
+              </a:rPr>
+              <a:t>-base</a:t>
+            </a:r>
+          </a:p>
+          <a:p>
+            <a:pPr algn="l">
+              <a:spcBef>
+                <a:spcPts val="1125"/>
+              </a:spcBef>
+              <a:spcAft>
+                <a:spcPts val="1125"/>
+              </a:spcAft>
+              <a:buFont typeface="Arial" panose="020B0604020202020204" pitchFamily="34" charset="0"/>
+              <a:buChar char="•"/>
+            </a:pPr>
+            <a:r>
+              <a:rPr lang="en-US" b="0" i="0" dirty="0">
+                <a:solidFill>
+                  <a:srgbClr val="000000"/>
+                </a:solidFill>
+                <a:effectLst/>
+                <a:latin typeface="Segoe UI" panose="020B0502040204020203" pitchFamily="34" charset="0"/>
+              </a:rPr>
+              <a:t>Learning rate: 2e-5</a:t>
+            </a:r>
+          </a:p>
+          <a:p>
+            <a:pPr algn="l">
+              <a:spcBef>
+                <a:spcPts val="1125"/>
+              </a:spcBef>
+              <a:spcAft>
+                <a:spcPts val="1125"/>
+              </a:spcAft>
+              <a:buFont typeface="Arial" panose="020B0604020202020204" pitchFamily="34" charset="0"/>
+              <a:buChar char="•"/>
+            </a:pPr>
+            <a:r>
+              <a:rPr lang="en-US" b="0" i="0" dirty="0">
+                <a:solidFill>
+                  <a:srgbClr val="000000"/>
+                </a:solidFill>
+                <a:effectLst/>
+                <a:latin typeface="Segoe UI" panose="020B0502040204020203" pitchFamily="34" charset="0"/>
+              </a:rPr>
+              <a:t>Batch size: 16</a:t>
+            </a:r>
+          </a:p>
+          <a:p>
+            <a:pPr algn="l">
+              <a:spcBef>
+                <a:spcPts val="1125"/>
+              </a:spcBef>
+              <a:spcAft>
+                <a:spcPts val="1125"/>
+              </a:spcAft>
+              <a:buFont typeface="Arial" panose="020B0604020202020204" pitchFamily="34" charset="0"/>
+              <a:buChar char="•"/>
+            </a:pPr>
+            <a:r>
+              <a:rPr lang="en-US" b="0" i="0" dirty="0">
+                <a:solidFill>
+                  <a:srgbClr val="000000"/>
+                </a:solidFill>
+                <a:effectLst/>
+                <a:latin typeface="Segoe UI" panose="020B0502040204020203" pitchFamily="34" charset="0"/>
+              </a:rPr>
+              <a:t>Epochs: 3</a:t>
+            </a:r>
+          </a:p>
+          <a:p>
+            <a:pPr algn="l">
+              <a:spcBef>
+                <a:spcPts val="1125"/>
+              </a:spcBef>
+              <a:spcAft>
+                <a:spcPts val="1125"/>
+              </a:spcAft>
+              <a:buFont typeface="Arial" panose="020B0604020202020204" pitchFamily="34" charset="0"/>
+              <a:buChar char="•"/>
+            </a:pPr>
+            <a:r>
+              <a:rPr lang="en-US" b="0" i="0" dirty="0">
+                <a:solidFill>
+                  <a:srgbClr val="000000"/>
+                </a:solidFill>
+                <a:effectLst/>
+                <a:latin typeface="Segoe UI" panose="020B0502040204020203" pitchFamily="34" charset="0"/>
+              </a:rPr>
+              <a:t>Library: </a:t>
+            </a:r>
+            <a:r>
+              <a:rPr lang="en-US" b="0" i="0" dirty="0" err="1">
+                <a:solidFill>
+                  <a:srgbClr val="000000"/>
+                </a:solidFill>
+                <a:effectLst/>
+                <a:latin typeface="Segoe UI" panose="020B0502040204020203" pitchFamily="34" charset="0"/>
+              </a:rPr>
+              <a:t>HuggingFace</a:t>
+            </a:r>
+            <a:r>
+              <a:rPr lang="en-US" b="0" i="0" dirty="0">
+                <a:solidFill>
+                  <a:srgbClr val="000000"/>
+                </a:solidFill>
+                <a:effectLst/>
+                <a:latin typeface="Segoe UI" panose="020B0502040204020203" pitchFamily="34" charset="0"/>
+              </a:rPr>
+              <a:t> Transformers</a:t>
+            </a:r>
+          </a:p>
+          <a:p>
+            <a:pPr algn="l">
+              <a:spcBef>
+                <a:spcPts val="1125"/>
+              </a:spcBef>
+              <a:spcAft>
+                <a:spcPts val="1125"/>
+              </a:spcAft>
+              <a:buFont typeface="Arial" panose="020B0604020202020204" pitchFamily="34" charset="0"/>
+              <a:buChar char="•"/>
+            </a:pPr>
+            <a:r>
+              <a:rPr lang="en-US" b="0" i="0" dirty="0">
+                <a:solidFill>
+                  <a:srgbClr val="000000"/>
+                </a:solidFill>
+                <a:effectLst/>
+                <a:latin typeface="Segoe UI" panose="020B0502040204020203" pitchFamily="34" charset="0"/>
+              </a:rPr>
+              <a:t>Expected: Significant improvement over baseline</a:t>
+            </a:r>
+          </a:p>
+        </p:txBody>
+      </p:sp>
+      <p:sp>
+        <p:nvSpPr>
+          <p:cNvPr id="9" name="TextBox 8">
+            <a:extLst>
+              <a:ext uri="{FF2B5EF4-FFF2-40B4-BE49-F238E27FC236}">
+                <a16:creationId xmlns:a16="http://schemas.microsoft.com/office/drawing/2014/main" id="{F3D48910-B7BB-D27E-1881-452D703AAB42}"/>
+              </a:ext>
+            </a:extLst>
+          </p:cNvPr>
+          <p:cNvSpPr txBox="1"/>
+          <p:nvPr/>
+        </p:nvSpPr>
+        <p:spPr>
+          <a:xfrm>
+            <a:off x="521766" y="659732"/>
+            <a:ext cx="6097162" cy="369332"/>
           </a:xfrm>
           <a:prstGeom prst="rect">
             <a:avLst/>
@@ -5796,272 +6226,22 @@
           <a:p>
             <a:pPr algn="l">
               <a:spcBef>
-                <a:spcPts val="1125"/>
+                <a:spcPts val="1500"/>
               </a:spcBef>
               <a:spcAft>
                 <a:spcPts val="1125"/>
               </a:spcAft>
-              <a:buFont typeface="Arial" panose="020B0604020202020204" pitchFamily="34" charset="0"/>
-              <a:buChar char="•"/>
+              <a:buNone/>
             </a:pPr>
             <a:r>
               <a:rPr lang="en-US" b="1" i="0" dirty="0">
                 <a:solidFill>
-                  <a:srgbClr val="000000"/>
-                </a:solidFill>
-                <a:effectLst/>
-                <a:latin typeface="Segoe UI" panose="020B0502040204020203" pitchFamily="34" charset="0"/>
-              </a:rPr>
-              <a:t>Sparse Vocabulary Explosion:</a:t>
-            </a:r>
-            <a:r>
-              <a:rPr lang="en-US" b="0" i="0" dirty="0">
-                <a:solidFill>
-                  <a:srgbClr val="000000"/>
-                </a:solidFill>
-                <a:effectLst/>
-                <a:latin typeface="Segoe UI" panose="020B0502040204020203" pitchFamily="34" charset="0"/>
-              </a:rPr>
-              <a:t> Tamil/Malayalam create thousands of unique tokens, each seen only a few times</a:t>
-            </a:r>
-          </a:p>
-          <a:p>
-            <a:pPr algn="l">
-              <a:spcBef>
-                <a:spcPts val="1125"/>
-              </a:spcBef>
-              <a:spcAft>
-                <a:spcPts val="1125"/>
-              </a:spcAft>
-              <a:buFont typeface="Arial" panose="020B0604020202020204" pitchFamily="34" charset="0"/>
-              <a:buChar char="•"/>
-            </a:pPr>
-            <a:r>
-              <a:rPr lang="en-US" b="1" i="0" dirty="0">
-                <a:solidFill>
-                  <a:srgbClr val="000000"/>
-                </a:solidFill>
-                <a:effectLst/>
-                <a:latin typeface="Segoe UI" panose="020B0502040204020203" pitchFamily="34" charset="0"/>
-              </a:rPr>
-              <a:t>Romanization Variability:</a:t>
-            </a:r>
-            <a:r>
-              <a:rPr lang="en-US" b="0" i="0" dirty="0">
-                <a:solidFill>
-                  <a:srgbClr val="000000"/>
-                </a:solidFill>
-                <a:effectLst/>
-                <a:latin typeface="Segoe UI" panose="020B0502040204020203" pitchFamily="34" charset="0"/>
-              </a:rPr>
-              <a:t> Same word appears as: "</a:t>
-            </a:r>
-            <a:r>
-              <a:rPr lang="en-US" b="0" i="0" dirty="0" err="1">
-                <a:solidFill>
-                  <a:srgbClr val="000000"/>
-                </a:solidFill>
-                <a:effectLst/>
-                <a:latin typeface="Segoe UI" panose="020B0502040204020203" pitchFamily="34" charset="0"/>
-              </a:rPr>
-              <a:t>nandhi</a:t>
-            </a:r>
-            <a:r>
-              <a:rPr lang="en-US" b="0" i="0" dirty="0">
-                <a:solidFill>
-                  <a:srgbClr val="000000"/>
-                </a:solidFill>
-                <a:effectLst/>
-                <a:latin typeface="Segoe UI" panose="020B0502040204020203" pitchFamily="34" charset="0"/>
-              </a:rPr>
-              <a:t>", "</a:t>
-            </a:r>
-            <a:r>
-              <a:rPr lang="en-US" b="0" i="0" dirty="0" err="1">
-                <a:solidFill>
-                  <a:srgbClr val="000000"/>
-                </a:solidFill>
-                <a:effectLst/>
-                <a:latin typeface="Segoe UI" panose="020B0502040204020203" pitchFamily="34" charset="0"/>
-              </a:rPr>
-              <a:t>nandi</a:t>
-            </a:r>
-            <a:r>
-              <a:rPr lang="en-US" b="0" i="0" dirty="0">
-                <a:solidFill>
-                  <a:srgbClr val="000000"/>
-                </a:solidFill>
-                <a:effectLst/>
-                <a:latin typeface="Segoe UI" panose="020B0502040204020203" pitchFamily="34" charset="0"/>
-              </a:rPr>
-              <a:t>", "</a:t>
-            </a:r>
-            <a:r>
-              <a:rPr lang="en-US" b="0" i="0" dirty="0" err="1">
-                <a:solidFill>
-                  <a:srgbClr val="000000"/>
-                </a:solidFill>
-                <a:effectLst/>
-                <a:latin typeface="Segoe UI" panose="020B0502040204020203" pitchFamily="34" charset="0"/>
-              </a:rPr>
-              <a:t>nandii</a:t>
-            </a:r>
-            <a:r>
-              <a:rPr lang="en-US" b="0" i="0" dirty="0">
-                <a:solidFill>
-                  <a:srgbClr val="000000"/>
-                </a:solidFill>
-                <a:effectLst/>
-                <a:latin typeface="Segoe UI" panose="020B0502040204020203" pitchFamily="34" charset="0"/>
-              </a:rPr>
-              <a:t>", "</a:t>
-            </a:r>
-            <a:r>
-              <a:rPr lang="en-US" b="0" i="0" dirty="0" err="1">
-                <a:solidFill>
-                  <a:srgbClr val="000000"/>
-                </a:solidFill>
-                <a:effectLst/>
-                <a:latin typeface="Segoe UI" panose="020B0502040204020203" pitchFamily="34" charset="0"/>
-              </a:rPr>
-              <a:t>nandee</a:t>
-            </a:r>
-            <a:r>
-              <a:rPr lang="en-US" b="0" i="0" dirty="0">
-                <a:solidFill>
-                  <a:srgbClr val="000000"/>
-                </a:solidFill>
-                <a:effectLst/>
-                <a:latin typeface="Segoe UI" panose="020B0502040204020203" pitchFamily="34" charset="0"/>
-              </a:rPr>
-              <a:t>" → all treated as different!</a:t>
-            </a:r>
-          </a:p>
-          <a:p>
-            <a:pPr algn="l">
-              <a:spcBef>
-                <a:spcPts val="1125"/>
-              </a:spcBef>
-              <a:spcAft>
-                <a:spcPts val="1125"/>
-              </a:spcAft>
-              <a:buFont typeface="Arial" panose="020B0604020202020204" pitchFamily="34" charset="0"/>
-              <a:buChar char="•"/>
-            </a:pPr>
-            <a:r>
-              <a:rPr lang="en-US" b="1" i="0" dirty="0">
-                <a:solidFill>
-                  <a:srgbClr val="000000"/>
-                </a:solidFill>
-                <a:effectLst/>
-                <a:latin typeface="Segoe UI" panose="020B0502040204020203" pitchFamily="34" charset="0"/>
-              </a:rPr>
-              <a:t>Code-switching ignorance:</a:t>
-            </a:r>
-            <a:r>
-              <a:rPr lang="en-US" b="0" i="0" dirty="0">
-                <a:solidFill>
-                  <a:srgbClr val="000000"/>
-                </a:solidFill>
-                <a:effectLst/>
-                <a:latin typeface="Segoe UI" panose="020B0502040204020203" pitchFamily="34" charset="0"/>
-              </a:rPr>
-              <a:t> Cannot understand context across language boundaries within single sentence</a:t>
-            </a:r>
-          </a:p>
-          <a:p>
-            <a:pPr algn="l">
-              <a:spcBef>
-                <a:spcPts val="1125"/>
-              </a:spcBef>
-              <a:spcAft>
-                <a:spcPts val="1125"/>
-              </a:spcAft>
-              <a:buFont typeface="Arial" panose="020B0604020202020204" pitchFamily="34" charset="0"/>
-              <a:buChar char="•"/>
-            </a:pPr>
-            <a:r>
-              <a:rPr lang="en-US" b="1" i="0" dirty="0">
-                <a:solidFill>
-                  <a:srgbClr val="000000"/>
-                </a:solidFill>
-                <a:effectLst/>
-                <a:latin typeface="Segoe UI" panose="020B0502040204020203" pitchFamily="34" charset="0"/>
-              </a:rPr>
-              <a:t>No long-range dependencies:</a:t>
-            </a:r>
-            <a:r>
-              <a:rPr lang="en-US" b="0" i="0" dirty="0">
-                <a:solidFill>
-                  <a:srgbClr val="000000"/>
-                </a:solidFill>
-                <a:effectLst/>
-                <a:latin typeface="Segoe UI" panose="020B0502040204020203" pitchFamily="34" charset="0"/>
-              </a:rPr>
-              <a:t> "I thought things would improve, but not anymore" → negation too far from "improve"</a:t>
-            </a:r>
-          </a:p>
-          <a:p>
-            <a:pPr algn="l">
-              <a:spcBef>
-                <a:spcPts val="1125"/>
-              </a:spcBef>
-              <a:spcAft>
-                <a:spcPts val="1125"/>
-              </a:spcAft>
-              <a:buFont typeface="Arial" panose="020B0604020202020204" pitchFamily="34" charset="0"/>
-              <a:buChar char="•"/>
-            </a:pPr>
-            <a:r>
-              <a:rPr lang="en-US" b="1" i="0" dirty="0">
-                <a:solidFill>
-                  <a:srgbClr val="000000"/>
-                </a:solidFill>
-                <a:effectLst/>
-                <a:latin typeface="Segoe UI" panose="020B0502040204020203" pitchFamily="34" charset="0"/>
-              </a:rPr>
-              <a:t>No semantic understanding:</a:t>
-            </a:r>
-            <a:r>
-              <a:rPr lang="en-US" b="0" i="0" dirty="0">
-                <a:solidFill>
-                  <a:srgbClr val="000000"/>
-                </a:solidFill>
-                <a:effectLst/>
-                <a:latin typeface="Segoe UI" panose="020B0502040204020203" pitchFamily="34" charset="0"/>
-              </a:rPr>
-              <a:t> "I'm here if you need someone" has no explicit positive words but is hopeful</a:t>
-            </a:r>
-          </a:p>
-          <a:p>
-            <a:pPr algn="l">
-              <a:spcBef>
-                <a:spcPts val="1125"/>
-              </a:spcBef>
-              <a:spcAft>
-                <a:spcPts val="1125"/>
-              </a:spcAft>
-              <a:buNone/>
-            </a:pPr>
-            <a:r>
-              <a:rPr lang="en-US" b="1" i="0" dirty="0">
-                <a:solidFill>
-                  <a:srgbClr val="000000"/>
-                </a:solidFill>
-                <a:effectLst/>
-                <a:latin typeface="Segoe UI" panose="020B0502040204020203" pitchFamily="34" charset="0"/>
-              </a:rPr>
-              <a:t>Solution:</a:t>
-            </a:r>
-            <a:r>
-              <a:rPr lang="en-US" b="0" i="0" dirty="0">
-                <a:solidFill>
-                  <a:srgbClr val="000000"/>
-                </a:solidFill>
-                <a:effectLst/>
-                <a:latin typeface="Segoe UI" panose="020B0502040204020203" pitchFamily="34" charset="0"/>
-              </a:rPr>
-              <a:t> Need contextual embeddings from multilingual transformers!</a:t>
+                  <a:srgbClr val="667EEA"/>
+                </a:solidFill>
+                <a:effectLst/>
+                <a:latin typeface="Segoe UI" panose="020B0502040204020203" pitchFamily="34" charset="0"/>
+              </a:rPr>
+              <a:t>XLM-Roberta Fine-tuning (Planned for Next Semester)</a:t>
             </a:r>
           </a:p>
         </p:txBody>
@@ -6069,7 +6249,7 @@
     </p:spTree>
     <p:extLst>
       <p:ext uri="{BB962C8B-B14F-4D97-AF65-F5344CB8AC3E}">
-        <p14:creationId xmlns:p14="http://schemas.microsoft.com/office/powerpoint/2010/main" val="541668011"/>
+        <p14:creationId xmlns:p14="http://schemas.microsoft.com/office/powerpoint/2010/main" val="2108753062"/>
       </p:ext>
     </p:extLst>
   </p:cSld>
@@ -6087,7 +6267,7 @@
         <p:cNvPr id="1" name="">
           <a:extLst>
             <a:ext uri="{FF2B5EF4-FFF2-40B4-BE49-F238E27FC236}">
-              <a16:creationId xmlns:a16="http://schemas.microsoft.com/office/drawing/2014/main" id="{4B8D4504-7950-3D92-0880-4495347B96DE}"/>
+              <a16:creationId xmlns:a16="http://schemas.microsoft.com/office/drawing/2014/main" id="{21F55901-F0D9-B880-CCD6-0AA470350F9F}"/>
             </a:ext>
           </a:extLst>
         </p:cNvPr>
@@ -6107,7 +6287,7 @@
           <p:cNvPr id="3" name="TextBox 2">
             <a:extLst>
               <a:ext uri="{FF2B5EF4-FFF2-40B4-BE49-F238E27FC236}">
-                <a16:creationId xmlns:a16="http://schemas.microsoft.com/office/drawing/2014/main" id="{E81527A4-C935-B67B-9923-3F30CBF11189}"/>
+                <a16:creationId xmlns:a16="http://schemas.microsoft.com/office/drawing/2014/main" id="{F3775BCC-746B-30DB-8E8D-C4949871CCC3}"/>
               </a:ext>
             </a:extLst>
           </p:cNvPr>
@@ -6116,8 +6296,8 @@
         </p:nvSpPr>
         <p:spPr>
           <a:xfrm>
-            <a:off x="521767" y="391197"/>
-            <a:ext cx="6097162" cy="369332"/>
+            <a:off x="507807" y="460998"/>
+            <a:ext cx="3903650" cy="369332"/>
           </a:xfrm>
           <a:prstGeom prst="rect">
             <a:avLst/>
@@ -6144,7 +6324,7 @@
                 <a:effectLst/>
                 <a:latin typeface="Segoe UI" panose="020B0502040204020203" pitchFamily="34" charset="0"/>
               </a:rPr>
-              <a:t>Unique Linguistic Challenges of Hope Speech 🗣️</a:t>
+              <a:t>Future Work (Next Semester) 🔮</a:t>
             </a:r>
           </a:p>
         </p:txBody>
@@ -6154,7 +6334,7 @@
           <p:cNvPr id="5" name="TextBox 4">
             <a:extLst>
               <a:ext uri="{FF2B5EF4-FFF2-40B4-BE49-F238E27FC236}">
-                <a16:creationId xmlns:a16="http://schemas.microsoft.com/office/drawing/2014/main" id="{1AD650B5-7B85-C703-A94D-7BDDF6F7A4C8}"/>
+                <a16:creationId xmlns:a16="http://schemas.microsoft.com/office/drawing/2014/main" id="{B0E95C94-3B98-8867-6CBA-75511066795A}"/>
               </a:ext>
             </a:extLst>
           </p:cNvPr>
@@ -6163,8 +6343,8 @@
         </p:nvSpPr>
         <p:spPr>
           <a:xfrm>
-            <a:off x="1844215" y="1213008"/>
-            <a:ext cx="8503570" cy="4431983"/>
+            <a:off x="3047419" y="1305341"/>
+            <a:ext cx="6097162" cy="4247317"/>
           </a:xfrm>
           <a:prstGeom prst="rect">
             <a:avLst/>
@@ -6177,221 +6357,76 @@
           </a:bodyPr>
           <a:lstStyle/>
           <a:p>
-            <a:pPr algn="l">
-              <a:spcBef>
-                <a:spcPts val="1125"/>
-              </a:spcBef>
-              <a:spcAft>
-                <a:spcPts val="1125"/>
-              </a:spcAft>
-              <a:buFont typeface="Arial" panose="020B0604020202020204" pitchFamily="34" charset="0"/>
-              <a:buChar char="•"/>
-            </a:pPr>
-            <a:r>
-              <a:rPr lang="en-US" b="1" i="0" dirty="0">
-                <a:solidFill>
-                  <a:srgbClr val="000000"/>
-                </a:solidFill>
-                <a:effectLst/>
-                <a:latin typeface="Segoe UI" panose="020B0502040204020203" pitchFamily="34" charset="0"/>
-              </a:rPr>
-              <a:t>Implicitness:</a:t>
-            </a:r>
-            <a:r>
-              <a:rPr lang="en-US" b="0" i="0" dirty="0">
-                <a:solidFill>
-                  <a:srgbClr val="000000"/>
-                </a:solidFill>
-                <a:effectLst/>
-                <a:latin typeface="Segoe UI" panose="020B0502040204020203" pitchFamily="34" charset="0"/>
-              </a:rPr>
-              <a:t> Hope often expressed without explicit positive keywords</a:t>
-            </a:r>
-          </a:p>
-          <a:p>
-            <a:pPr marL="742950" lvl="1" indent="-285750" algn="l">
-              <a:spcBef>
-                <a:spcPts val="1125"/>
-              </a:spcBef>
-              <a:spcAft>
-                <a:spcPts val="1125"/>
-              </a:spcAft>
-              <a:buFont typeface="Arial" panose="020B0604020202020204" pitchFamily="34" charset="0"/>
-              <a:buChar char="•"/>
-            </a:pPr>
-            <a:r>
-              <a:rPr lang="en-US" b="0" i="0" dirty="0">
-                <a:solidFill>
-                  <a:srgbClr val="000000"/>
-                </a:solidFill>
-                <a:effectLst/>
-                <a:latin typeface="Segoe UI" panose="020B0502040204020203" pitchFamily="34" charset="0"/>
-              </a:rPr>
-              <a:t>Example: "I'm here if you need someone" → no "hope" word</a:t>
-            </a:r>
-          </a:p>
-          <a:p>
-            <a:pPr algn="l">
-              <a:spcBef>
-                <a:spcPts val="1125"/>
-              </a:spcBef>
-              <a:spcAft>
-                <a:spcPts val="1125"/>
-              </a:spcAft>
-              <a:buFont typeface="Arial" panose="020B0604020202020204" pitchFamily="34" charset="0"/>
-              <a:buChar char="•"/>
-            </a:pPr>
-            <a:r>
-              <a:rPr lang="en-US" b="1" i="0" dirty="0">
-                <a:solidFill>
-                  <a:srgbClr val="000000"/>
-                </a:solidFill>
-                <a:effectLst/>
-                <a:latin typeface="Segoe UI" panose="020B0502040204020203" pitchFamily="34" charset="0"/>
-              </a:rPr>
-              <a:t>Future-oriented semantics:</a:t>
-            </a:r>
-            <a:r>
-              <a:rPr lang="en-US" b="0" i="0" dirty="0">
-                <a:solidFill>
-                  <a:srgbClr val="000000"/>
-                </a:solidFill>
-                <a:effectLst/>
-                <a:latin typeface="Segoe UI" panose="020B0502040204020203" pitchFamily="34" charset="0"/>
-              </a:rPr>
-              <a:t> "Things will get better" requires temporal understanding</a:t>
-            </a:r>
-          </a:p>
-          <a:p>
-            <a:pPr algn="l">
-              <a:spcBef>
-                <a:spcPts val="1125"/>
-              </a:spcBef>
-              <a:spcAft>
-                <a:spcPts val="1125"/>
-              </a:spcAft>
-              <a:buFont typeface="Arial" panose="020B0604020202020204" pitchFamily="34" charset="0"/>
-              <a:buChar char="•"/>
-            </a:pPr>
-            <a:r>
-              <a:rPr lang="en-US" b="1" i="0" dirty="0">
-                <a:solidFill>
-                  <a:srgbClr val="000000"/>
-                </a:solidFill>
-                <a:effectLst/>
-                <a:latin typeface="Segoe UI" panose="020B0502040204020203" pitchFamily="34" charset="0"/>
-              </a:rPr>
-              <a:t>Cultural variation:</a:t>
-            </a:r>
-            <a:r>
-              <a:rPr lang="en-US" b="0" i="0" dirty="0">
-                <a:solidFill>
-                  <a:srgbClr val="000000"/>
-                </a:solidFill>
-                <a:effectLst/>
-                <a:latin typeface="Segoe UI" panose="020B0502040204020203" pitchFamily="34" charset="0"/>
-              </a:rPr>
-              <a:t> Tamil/Malayalam optimism encoded through cultural idioms</a:t>
-            </a:r>
-          </a:p>
-          <a:p>
-            <a:pPr algn="l">
-              <a:spcBef>
-                <a:spcPts val="1125"/>
-              </a:spcBef>
-              <a:spcAft>
-                <a:spcPts val="1125"/>
-              </a:spcAft>
-              <a:buFont typeface="Arial" panose="020B0604020202020204" pitchFamily="34" charset="0"/>
-              <a:buChar char="•"/>
-            </a:pPr>
-            <a:r>
-              <a:rPr lang="en-US" b="1" i="0" dirty="0">
-                <a:solidFill>
-                  <a:srgbClr val="000000"/>
-                </a:solidFill>
-                <a:effectLst/>
-                <a:latin typeface="Segoe UI" panose="020B0502040204020203" pitchFamily="34" charset="0"/>
-              </a:rPr>
-              <a:t>Honorifics matter:</a:t>
-            </a:r>
-            <a:r>
-              <a:rPr lang="en-US" b="0" i="0" dirty="0">
-                <a:solidFill>
-                  <a:srgbClr val="000000"/>
-                </a:solidFill>
-                <a:effectLst/>
-                <a:latin typeface="Segoe UI" panose="020B0502040204020203" pitchFamily="34" charset="0"/>
-              </a:rPr>
-              <a:t> South Indian languages use respectful forms to convey support</a:t>
-            </a:r>
-          </a:p>
-          <a:p>
-            <a:pPr algn="l">
-              <a:spcBef>
-                <a:spcPts val="1125"/>
-              </a:spcBef>
-              <a:spcAft>
-                <a:spcPts val="1125"/>
-              </a:spcAft>
-              <a:buFont typeface="Arial" panose="020B0604020202020204" pitchFamily="34" charset="0"/>
-              <a:buChar char="•"/>
-            </a:pPr>
-            <a:r>
-              <a:rPr lang="en-US" b="1" i="0" dirty="0">
-                <a:solidFill>
-                  <a:srgbClr val="000000"/>
-                </a:solidFill>
-                <a:effectLst/>
-                <a:latin typeface="Segoe UI" panose="020B0502040204020203" pitchFamily="34" charset="0"/>
-              </a:rPr>
-              <a:t>Context-dependent:</a:t>
-            </a:r>
-            <a:r>
-              <a:rPr lang="en-US" b="0" i="0" dirty="0">
-                <a:solidFill>
-                  <a:srgbClr val="000000"/>
-                </a:solidFill>
-                <a:effectLst/>
-                <a:latin typeface="Segoe UI" panose="020B0502040204020203" pitchFamily="34" charset="0"/>
-              </a:rPr>
-              <a:t> Same phrase can be hopeful or sarcastic based on context</a:t>
-            </a:r>
-          </a:p>
-          <a:p>
-            <a:pPr algn="ctr">
-              <a:spcBef>
-                <a:spcPts val="2250"/>
-              </a:spcBef>
-              <a:spcAft>
-                <a:spcPts val="1500"/>
-              </a:spcAft>
-              <a:buNone/>
-            </a:pPr>
-            <a:r>
-              <a:rPr lang="en-US" b="1" i="0" dirty="0">
-                <a:solidFill>
-                  <a:srgbClr val="000000"/>
-                </a:solidFill>
-                <a:effectLst/>
-                <a:latin typeface="Segoe UI" panose="020B0502040204020203" pitchFamily="34" charset="0"/>
-              </a:rPr>
-              <a:t>Hope speech ≠ Sentiment analysis ≠ Opposite of hate speech</a:t>
-            </a:r>
-            <a:endParaRPr lang="en-US" b="0" i="0" dirty="0">
-              <a:solidFill>
-                <a:srgbClr val="000000"/>
-              </a:solidFill>
-              <a:effectLst/>
-              <a:latin typeface="Segoe UI" panose="020B0502040204020203" pitchFamily="34" charset="0"/>
-            </a:endParaRPr>
+            <a:r>
+              <a:rPr lang="en-US" b="1" dirty="0"/>
+              <a:t>1. Large-Scale YouTube Scraping</a:t>
+            </a:r>
+          </a:p>
+          <a:p>
+            <a:r>
+              <a:rPr lang="en-US" dirty="0"/>
+              <a:t>Automated extraction of 10k+ comments in Telugu, Tamil, Malayalam from motivational videos, mental health channels, devotional content</a:t>
+            </a:r>
+          </a:p>
+          <a:p>
+            <a:endParaRPr lang="en-US" dirty="0"/>
+          </a:p>
+          <a:p>
+            <a:r>
+              <a:rPr lang="en-US" b="1" dirty="0"/>
+              <a:t>2. Multilingual Annotation Guidelines</a:t>
+            </a:r>
+          </a:p>
+          <a:p>
+            <a:r>
+              <a:rPr lang="en-US" dirty="0"/>
+              <a:t>Consistent labeling framework for hope, non-hope, toxic positivity across languages</a:t>
+            </a:r>
+          </a:p>
+          <a:p>
+            <a:endParaRPr lang="en-US" dirty="0"/>
+          </a:p>
+          <a:p>
+            <a:r>
+              <a:rPr lang="en-US" b="1" dirty="0"/>
+              <a:t>3. Transformer Fine-tuning</a:t>
+            </a:r>
+          </a:p>
+          <a:p>
+            <a:r>
+              <a:rPr lang="en-US" dirty="0"/>
+              <a:t>XLM-Roberta / </a:t>
+            </a:r>
+            <a:r>
+              <a:rPr lang="en-US" dirty="0" err="1"/>
+              <a:t>mBERT</a:t>
+            </a:r>
+            <a:r>
+              <a:rPr lang="en-US" dirty="0"/>
+              <a:t> training on combined datasets</a:t>
+            </a:r>
+          </a:p>
+          <a:p>
+            <a:endParaRPr lang="en-US" dirty="0"/>
+          </a:p>
+          <a:p>
+            <a:r>
+              <a:rPr lang="en-US" b="1" dirty="0"/>
+              <a:t>4. Toxic Positivity Dataset Expansion</a:t>
+            </a:r>
+          </a:p>
+          <a:p>
+            <a:r>
+              <a:rPr lang="en-US" dirty="0"/>
+              <a:t>Especially for Tamil and Malayalam (currently underrepresented)</a:t>
+            </a:r>
           </a:p>
         </p:txBody>
       </p:sp>
     </p:spTree>
     <p:extLst>
       <p:ext uri="{BB962C8B-B14F-4D97-AF65-F5344CB8AC3E}">
-        <p14:creationId xmlns:p14="http://schemas.microsoft.com/office/powerpoint/2010/main" val="368273198"/>
+        <p14:creationId xmlns:p14="http://schemas.microsoft.com/office/powerpoint/2010/main" val="890269783"/>
       </p:ext>
     </p:extLst>
   </p:cSld>
@@ -6409,7 +6444,7 @@
         <p:cNvPr id="1" name="">
           <a:extLst>
             <a:ext uri="{FF2B5EF4-FFF2-40B4-BE49-F238E27FC236}">
-              <a16:creationId xmlns:a16="http://schemas.microsoft.com/office/drawing/2014/main" id="{F8F7004D-5AE3-A2C7-9EC7-49A80916B105}"/>
+              <a16:creationId xmlns:a16="http://schemas.microsoft.com/office/drawing/2014/main" id="{534C1968-9123-423B-2EDF-7872102C3547}"/>
             </a:ext>
           </a:extLst>
         </p:cNvPr>
@@ -6429,7 +6464,7 @@
           <p:cNvPr id="3" name="TextBox 2">
             <a:extLst>
               <a:ext uri="{FF2B5EF4-FFF2-40B4-BE49-F238E27FC236}">
-                <a16:creationId xmlns:a16="http://schemas.microsoft.com/office/drawing/2014/main" id="{AF250135-F046-6EF3-2729-7F8101DD5911}"/>
+                <a16:creationId xmlns:a16="http://schemas.microsoft.com/office/drawing/2014/main" id="{D86C4F88-BB73-3DEF-D55C-727B9CE11004}"/>
               </a:ext>
             </a:extLst>
           </p:cNvPr>
@@ -6438,8 +6473,8 @@
         </p:nvSpPr>
         <p:spPr>
           <a:xfrm>
-            <a:off x="521766" y="328375"/>
-            <a:ext cx="6097162" cy="369332"/>
+            <a:off x="493846" y="265553"/>
+            <a:ext cx="2884548" cy="369332"/>
           </a:xfrm>
           <a:prstGeom prst="rect">
             <a:avLst/>
@@ -6466,17 +6501,17 @@
                 <a:effectLst/>
                 <a:latin typeface="Segoe UI" panose="020B0502040204020203" pitchFamily="34" charset="0"/>
               </a:rPr>
-              <a:t>Next Phase: Multilingual Transformers 🚀</a:t>
-            </a:r>
-          </a:p>
-        </p:txBody>
-      </p:sp>
-      <p:sp>
-        <p:nvSpPr>
-          <p:cNvPr id="5" name="TextBox 4">
-            <a:extLst>
-              <a:ext uri="{FF2B5EF4-FFF2-40B4-BE49-F238E27FC236}">
-                <a16:creationId xmlns:a16="http://schemas.microsoft.com/office/drawing/2014/main" id="{4945AFA3-C61F-29AC-3C9B-EE684A47F44E}"/>
+              <a:t>Conclusion &amp; Impact 🎯</a:t>
+            </a:r>
+          </a:p>
+        </p:txBody>
+      </p:sp>
+      <p:sp>
+        <p:nvSpPr>
+          <p:cNvPr id="7" name="TextBox 6">
+            <a:extLst>
+              <a:ext uri="{FF2B5EF4-FFF2-40B4-BE49-F238E27FC236}">
+                <a16:creationId xmlns:a16="http://schemas.microsoft.com/office/drawing/2014/main" id="{3E44A755-B126-5056-D9E0-AD4E28B1D75E}"/>
               </a:ext>
             </a:extLst>
           </p:cNvPr>
@@ -6485,440 +6520,8 @@
         </p:nvSpPr>
         <p:spPr>
           <a:xfrm>
-            <a:off x="654389" y="1655949"/>
-            <a:ext cx="4894832" cy="3164969"/>
-          </a:xfrm>
-          <a:prstGeom prst="rect">
-            <a:avLst/>
-          </a:prstGeom>
-          <a:noFill/>
-          <a:ln>
-            <a:solidFill>
-              <a:schemeClr val="tx1"/>
-            </a:solidFill>
-          </a:ln>
-        </p:spPr>
-        <p:txBody>
-          <a:bodyPr wrap="square">
-            <a:spAutoFit/>
-          </a:bodyPr>
-          <a:lstStyle/>
-          <a:p>
-            <a:pPr algn="l">
-              <a:spcBef>
-                <a:spcPts val="1500"/>
-              </a:spcBef>
-              <a:spcAft>
-                <a:spcPts val="1125"/>
-              </a:spcAft>
-              <a:buNone/>
-            </a:pPr>
-            <a:r>
-              <a:rPr lang="en-US" b="1" i="0" dirty="0">
-                <a:solidFill>
-                  <a:srgbClr val="667EEA"/>
-                </a:solidFill>
-                <a:effectLst/>
-                <a:latin typeface="Segoe UI" panose="020B0502040204020203" pitchFamily="34" charset="0"/>
-              </a:rPr>
-              <a:t>Why XLM-R?</a:t>
-            </a:r>
-          </a:p>
-          <a:p>
-            <a:pPr algn="l">
-              <a:spcBef>
-                <a:spcPts val="1125"/>
-              </a:spcBef>
-              <a:spcAft>
-                <a:spcPts val="1125"/>
-              </a:spcAft>
-              <a:buFont typeface="Arial" panose="020B0604020202020204" pitchFamily="34" charset="0"/>
-              <a:buChar char="•"/>
-            </a:pPr>
-            <a:r>
-              <a:rPr lang="en-US" b="0" i="0" dirty="0">
-                <a:solidFill>
-                  <a:srgbClr val="000000"/>
-                </a:solidFill>
-                <a:effectLst/>
-                <a:latin typeface="Segoe UI" panose="020B0502040204020203" pitchFamily="34" charset="0"/>
-              </a:rPr>
-              <a:t>Pre-trained on 100 languages</a:t>
-            </a:r>
-          </a:p>
-          <a:p>
-            <a:pPr algn="l">
-              <a:spcBef>
-                <a:spcPts val="1125"/>
-              </a:spcBef>
-              <a:spcAft>
-                <a:spcPts val="1125"/>
-              </a:spcAft>
-              <a:buFont typeface="Arial" panose="020B0604020202020204" pitchFamily="34" charset="0"/>
-              <a:buChar char="•"/>
-            </a:pPr>
-            <a:r>
-              <a:rPr lang="en-US" b="0" i="0" dirty="0">
-                <a:solidFill>
-                  <a:srgbClr val="000000"/>
-                </a:solidFill>
-                <a:effectLst/>
-                <a:latin typeface="Segoe UI" panose="020B0502040204020203" pitchFamily="34" charset="0"/>
-              </a:rPr>
-              <a:t>Shares </a:t>
-            </a:r>
-            <a:r>
-              <a:rPr lang="en-US" b="0" i="0" dirty="0" err="1">
-                <a:solidFill>
-                  <a:srgbClr val="000000"/>
-                </a:solidFill>
-                <a:effectLst/>
-                <a:latin typeface="Segoe UI" panose="020B0502040204020203" pitchFamily="34" charset="0"/>
-              </a:rPr>
-              <a:t>subword</a:t>
-            </a:r>
-            <a:r>
-              <a:rPr lang="en-US" b="0" i="0" dirty="0">
-                <a:solidFill>
-                  <a:srgbClr val="000000"/>
-                </a:solidFill>
-                <a:effectLst/>
-                <a:latin typeface="Segoe UI" panose="020B0502040204020203" pitchFamily="34" charset="0"/>
-              </a:rPr>
-              <a:t> representations across scripts</a:t>
-            </a:r>
-          </a:p>
-          <a:p>
-            <a:pPr algn="l">
-              <a:spcBef>
-                <a:spcPts val="1125"/>
-              </a:spcBef>
-              <a:spcAft>
-                <a:spcPts val="1125"/>
-              </a:spcAft>
-              <a:buFont typeface="Arial" panose="020B0604020202020204" pitchFamily="34" charset="0"/>
-              <a:buChar char="•"/>
-            </a:pPr>
-            <a:r>
-              <a:rPr lang="en-US" b="0" i="0" dirty="0">
-                <a:solidFill>
-                  <a:srgbClr val="000000"/>
-                </a:solidFill>
-                <a:effectLst/>
-                <a:latin typeface="Segoe UI" panose="020B0502040204020203" pitchFamily="34" charset="0"/>
-              </a:rPr>
-              <a:t>Handles code-mixing naturally</a:t>
-            </a:r>
-          </a:p>
-          <a:p>
-            <a:pPr algn="l">
-              <a:spcBef>
-                <a:spcPts val="1125"/>
-              </a:spcBef>
-              <a:spcAft>
-                <a:spcPts val="1125"/>
-              </a:spcAft>
-              <a:buFont typeface="Arial" panose="020B0604020202020204" pitchFamily="34" charset="0"/>
-              <a:buChar char="•"/>
-            </a:pPr>
-            <a:r>
-              <a:rPr lang="en-US" b="0" i="0" dirty="0">
-                <a:solidFill>
-                  <a:srgbClr val="000000"/>
-                </a:solidFill>
-                <a:effectLst/>
-                <a:latin typeface="Segoe UI" panose="020B0502040204020203" pitchFamily="34" charset="0"/>
-              </a:rPr>
-              <a:t>Captures long-range dependencies</a:t>
-            </a:r>
-          </a:p>
-          <a:p>
-            <a:pPr algn="l">
-              <a:spcBef>
-                <a:spcPts val="1125"/>
-              </a:spcBef>
-              <a:spcAft>
-                <a:spcPts val="1125"/>
-              </a:spcAft>
-              <a:buFont typeface="Arial" panose="020B0604020202020204" pitchFamily="34" charset="0"/>
-              <a:buChar char="•"/>
-            </a:pPr>
-            <a:r>
-              <a:rPr lang="en-US" b="0" i="0" dirty="0">
-                <a:solidFill>
-                  <a:srgbClr val="000000"/>
-                </a:solidFill>
-                <a:effectLst/>
-                <a:latin typeface="Segoe UI" panose="020B0502040204020203" pitchFamily="34" charset="0"/>
-              </a:rPr>
-              <a:t>Understands context &amp; semantics</a:t>
-            </a:r>
-          </a:p>
-        </p:txBody>
-      </p:sp>
-      <p:sp>
-        <p:nvSpPr>
-          <p:cNvPr id="7" name="TextBox 6">
-            <a:extLst>
-              <a:ext uri="{FF2B5EF4-FFF2-40B4-BE49-F238E27FC236}">
-                <a16:creationId xmlns:a16="http://schemas.microsoft.com/office/drawing/2014/main" id="{05693769-BBBC-6C42-6D51-D90D808A75DF}"/>
-              </a:ext>
-            </a:extLst>
-          </p:cNvPr>
-          <p:cNvSpPr txBox="1"/>
-          <p:nvPr/>
-        </p:nvSpPr>
-        <p:spPr>
-          <a:xfrm>
-            <a:off x="6096000" y="1655949"/>
-            <a:ext cx="5264780" cy="3724096"/>
-          </a:xfrm>
-          <a:prstGeom prst="rect">
-            <a:avLst/>
-          </a:prstGeom>
-          <a:noFill/>
-          <a:ln>
-            <a:solidFill>
-              <a:schemeClr val="tx1"/>
-            </a:solidFill>
-          </a:ln>
-        </p:spPr>
-        <p:txBody>
-          <a:bodyPr wrap="square">
-            <a:spAutoFit/>
-          </a:bodyPr>
-          <a:lstStyle/>
-          <a:p>
-            <a:pPr algn="l">
-              <a:spcBef>
-                <a:spcPts val="1500"/>
-              </a:spcBef>
-              <a:spcAft>
-                <a:spcPts val="1125"/>
-              </a:spcAft>
-              <a:buNone/>
-            </a:pPr>
-            <a:r>
-              <a:rPr lang="en-US" b="1" i="0" dirty="0">
-                <a:solidFill>
-                  <a:srgbClr val="667EEA"/>
-                </a:solidFill>
-                <a:effectLst/>
-                <a:latin typeface="Segoe UI" panose="020B0502040204020203" pitchFamily="34" charset="0"/>
-              </a:rPr>
-              <a:t>Implementation Plan</a:t>
-            </a:r>
-          </a:p>
-          <a:p>
-            <a:pPr algn="l">
-              <a:spcBef>
-                <a:spcPts val="1125"/>
-              </a:spcBef>
-              <a:spcAft>
-                <a:spcPts val="1125"/>
-              </a:spcAft>
-              <a:buFont typeface="Arial" panose="020B0604020202020204" pitchFamily="34" charset="0"/>
-              <a:buChar char="•"/>
-            </a:pPr>
-            <a:r>
-              <a:rPr lang="en-US" b="0" i="0" dirty="0">
-                <a:solidFill>
-                  <a:srgbClr val="000000"/>
-                </a:solidFill>
-                <a:effectLst/>
-                <a:latin typeface="Segoe UI" panose="020B0502040204020203" pitchFamily="34" charset="0"/>
-              </a:rPr>
-              <a:t>Model: </a:t>
-            </a:r>
-            <a:r>
-              <a:rPr lang="en-US" b="0" i="0" dirty="0" err="1">
-                <a:solidFill>
-                  <a:srgbClr val="000000"/>
-                </a:solidFill>
-                <a:effectLst/>
-                <a:latin typeface="Segoe UI" panose="020B0502040204020203" pitchFamily="34" charset="0"/>
-              </a:rPr>
-              <a:t>xlm</a:t>
-            </a:r>
-            <a:r>
-              <a:rPr lang="en-US" b="0" i="0" dirty="0">
-                <a:solidFill>
-                  <a:srgbClr val="000000"/>
-                </a:solidFill>
-                <a:effectLst/>
-                <a:latin typeface="Segoe UI" panose="020B0502040204020203" pitchFamily="34" charset="0"/>
-              </a:rPr>
-              <a:t>-</a:t>
-            </a:r>
-            <a:r>
-              <a:rPr lang="en-US" b="0" i="0" dirty="0" err="1">
-                <a:solidFill>
-                  <a:srgbClr val="000000"/>
-                </a:solidFill>
-                <a:effectLst/>
-                <a:latin typeface="Segoe UI" panose="020B0502040204020203" pitchFamily="34" charset="0"/>
-              </a:rPr>
-              <a:t>roberta</a:t>
-            </a:r>
-            <a:r>
-              <a:rPr lang="en-US" b="0" i="0" dirty="0">
-                <a:solidFill>
-                  <a:srgbClr val="000000"/>
-                </a:solidFill>
-                <a:effectLst/>
-                <a:latin typeface="Segoe UI" panose="020B0502040204020203" pitchFamily="34" charset="0"/>
-              </a:rPr>
-              <a:t>-base</a:t>
-            </a:r>
-          </a:p>
-          <a:p>
-            <a:pPr algn="l">
-              <a:spcBef>
-                <a:spcPts val="1125"/>
-              </a:spcBef>
-              <a:spcAft>
-                <a:spcPts val="1125"/>
-              </a:spcAft>
-              <a:buFont typeface="Arial" panose="020B0604020202020204" pitchFamily="34" charset="0"/>
-              <a:buChar char="•"/>
-            </a:pPr>
-            <a:r>
-              <a:rPr lang="en-US" b="0" i="0" dirty="0">
-                <a:solidFill>
-                  <a:srgbClr val="000000"/>
-                </a:solidFill>
-                <a:effectLst/>
-                <a:latin typeface="Segoe UI" panose="020B0502040204020203" pitchFamily="34" charset="0"/>
-              </a:rPr>
-              <a:t>Learning rate: 2e-5</a:t>
-            </a:r>
-          </a:p>
-          <a:p>
-            <a:pPr algn="l">
-              <a:spcBef>
-                <a:spcPts val="1125"/>
-              </a:spcBef>
-              <a:spcAft>
-                <a:spcPts val="1125"/>
-              </a:spcAft>
-              <a:buFont typeface="Arial" panose="020B0604020202020204" pitchFamily="34" charset="0"/>
-              <a:buChar char="•"/>
-            </a:pPr>
-            <a:r>
-              <a:rPr lang="en-US" b="0" i="0" dirty="0">
-                <a:solidFill>
-                  <a:srgbClr val="000000"/>
-                </a:solidFill>
-                <a:effectLst/>
-                <a:latin typeface="Segoe UI" panose="020B0502040204020203" pitchFamily="34" charset="0"/>
-              </a:rPr>
-              <a:t>Batch size: 16</a:t>
-            </a:r>
-          </a:p>
-          <a:p>
-            <a:pPr algn="l">
-              <a:spcBef>
-                <a:spcPts val="1125"/>
-              </a:spcBef>
-              <a:spcAft>
-                <a:spcPts val="1125"/>
-              </a:spcAft>
-              <a:buFont typeface="Arial" panose="020B0604020202020204" pitchFamily="34" charset="0"/>
-              <a:buChar char="•"/>
-            </a:pPr>
-            <a:r>
-              <a:rPr lang="en-US" b="0" i="0" dirty="0">
-                <a:solidFill>
-                  <a:srgbClr val="000000"/>
-                </a:solidFill>
-                <a:effectLst/>
-                <a:latin typeface="Segoe UI" panose="020B0502040204020203" pitchFamily="34" charset="0"/>
-              </a:rPr>
-              <a:t>Epochs: 3</a:t>
-            </a:r>
-          </a:p>
-          <a:p>
-            <a:pPr algn="l">
-              <a:spcBef>
-                <a:spcPts val="1125"/>
-              </a:spcBef>
-              <a:spcAft>
-                <a:spcPts val="1125"/>
-              </a:spcAft>
-              <a:buFont typeface="Arial" panose="020B0604020202020204" pitchFamily="34" charset="0"/>
-              <a:buChar char="•"/>
-            </a:pPr>
-            <a:r>
-              <a:rPr lang="en-US" b="0" i="0" dirty="0">
-                <a:solidFill>
-                  <a:srgbClr val="000000"/>
-                </a:solidFill>
-                <a:effectLst/>
-                <a:latin typeface="Segoe UI" panose="020B0502040204020203" pitchFamily="34" charset="0"/>
-              </a:rPr>
-              <a:t>Library: </a:t>
-            </a:r>
-            <a:r>
-              <a:rPr lang="en-US" b="0" i="0" dirty="0" err="1">
-                <a:solidFill>
-                  <a:srgbClr val="000000"/>
-                </a:solidFill>
-                <a:effectLst/>
-                <a:latin typeface="Segoe UI" panose="020B0502040204020203" pitchFamily="34" charset="0"/>
-              </a:rPr>
-              <a:t>HuggingFace</a:t>
-            </a:r>
-            <a:r>
-              <a:rPr lang="en-US" b="0" i="0" dirty="0">
-                <a:solidFill>
-                  <a:srgbClr val="000000"/>
-                </a:solidFill>
-                <a:effectLst/>
-                <a:latin typeface="Segoe UI" panose="020B0502040204020203" pitchFamily="34" charset="0"/>
-              </a:rPr>
-              <a:t> Transformers</a:t>
-            </a:r>
-          </a:p>
-          <a:p>
-            <a:pPr algn="l">
-              <a:spcBef>
-                <a:spcPts val="1125"/>
-              </a:spcBef>
-              <a:spcAft>
-                <a:spcPts val="1125"/>
-              </a:spcAft>
-              <a:buFont typeface="Arial" panose="020B0604020202020204" pitchFamily="34" charset="0"/>
-              <a:buChar char="•"/>
-            </a:pPr>
-            <a:r>
-              <a:rPr lang="en-US" b="0" i="0" dirty="0">
-                <a:solidFill>
-                  <a:srgbClr val="000000"/>
-                </a:solidFill>
-                <a:effectLst/>
-                <a:latin typeface="Segoe UI" panose="020B0502040204020203" pitchFamily="34" charset="0"/>
-              </a:rPr>
-              <a:t>Expected: Significant improvement over baseline</a:t>
-            </a:r>
-          </a:p>
-        </p:txBody>
-      </p:sp>
-      <p:sp>
-        <p:nvSpPr>
-          <p:cNvPr id="9" name="TextBox 8">
-            <a:extLst>
-              <a:ext uri="{FF2B5EF4-FFF2-40B4-BE49-F238E27FC236}">
-                <a16:creationId xmlns:a16="http://schemas.microsoft.com/office/drawing/2014/main" id="{F3D48910-B7BB-D27E-1881-452D703AAB42}"/>
-              </a:ext>
-            </a:extLst>
-          </p:cNvPr>
-          <p:cNvSpPr txBox="1"/>
-          <p:nvPr/>
-        </p:nvSpPr>
-        <p:spPr>
-          <a:xfrm>
-            <a:off x="521766" y="659732"/>
-            <a:ext cx="6097162" cy="369332"/>
+            <a:off x="2214163" y="1187360"/>
+            <a:ext cx="7763674" cy="4483279"/>
           </a:xfrm>
           <a:prstGeom prst="rect">
             <a:avLst/>
@@ -6948,15 +6551,154 @@
                 <a:effectLst/>
                 <a:latin typeface="Segoe UI" panose="020B0502040204020203" pitchFamily="34" charset="0"/>
               </a:rPr>
-              <a:t>XLM-Roberta Fine-tuning (Planned for Next Semester)</a:t>
-            </a:r>
+              <a:t>Key Accomplishments</a:t>
+            </a:r>
+          </a:p>
+          <a:p>
+            <a:pPr algn="l">
+              <a:spcBef>
+                <a:spcPts val="1125"/>
+              </a:spcBef>
+              <a:spcAft>
+                <a:spcPts val="1125"/>
+              </a:spcAft>
+            </a:pPr>
+            <a:r>
+              <a:rPr lang="en-US" b="0" i="0" dirty="0">
+                <a:solidFill>
+                  <a:srgbClr val="000000"/>
+                </a:solidFill>
+                <a:effectLst/>
+                <a:latin typeface="Segoe UI" panose="020B0502040204020203" pitchFamily="34" charset="0"/>
+              </a:rPr>
+              <a:t>✓ Built complete preprocessing pipeline for multilingual hope speech</a:t>
+            </a:r>
+          </a:p>
+          <a:p>
+            <a:pPr algn="l">
+              <a:spcBef>
+                <a:spcPts val="1125"/>
+              </a:spcBef>
+              <a:spcAft>
+                <a:spcPts val="1125"/>
+              </a:spcAft>
+            </a:pPr>
+            <a:r>
+              <a:rPr lang="en-US" b="0" i="0" dirty="0">
+                <a:solidFill>
+                  <a:srgbClr val="000000"/>
+                </a:solidFill>
+                <a:effectLst/>
+                <a:latin typeface="Segoe UI" panose="020B0502040204020203" pitchFamily="34" charset="0"/>
+              </a:rPr>
+              <a:t>✓ Established baseline performance metrics (English: 80.4%, Tamil: 63.4%, Malayalam: 30.3%)</a:t>
+            </a:r>
+          </a:p>
+          <a:p>
+            <a:pPr algn="l">
+              <a:spcBef>
+                <a:spcPts val="1125"/>
+              </a:spcBef>
+              <a:spcAft>
+                <a:spcPts val="1125"/>
+              </a:spcAft>
+            </a:pPr>
+            <a:r>
+              <a:rPr lang="en-US" b="0" i="0" dirty="0">
+                <a:solidFill>
+                  <a:srgbClr val="000000"/>
+                </a:solidFill>
+                <a:effectLst/>
+                <a:latin typeface="Segoe UI" panose="020B0502040204020203" pitchFamily="34" charset="0"/>
+              </a:rPr>
+              <a:t>✓ Identified critical challenges: negation, code-mixing, toxic positivity</a:t>
+            </a:r>
+          </a:p>
+          <a:p>
+            <a:pPr algn="l">
+              <a:spcBef>
+                <a:spcPts val="1125"/>
+              </a:spcBef>
+              <a:spcAft>
+                <a:spcPts val="1125"/>
+              </a:spcAft>
+            </a:pPr>
+            <a:r>
+              <a:rPr lang="en-US" b="0" i="0" dirty="0">
+                <a:solidFill>
+                  <a:srgbClr val="000000"/>
+                </a:solidFill>
+                <a:effectLst/>
+                <a:latin typeface="Segoe UI" panose="020B0502040204020203" pitchFamily="34" charset="0"/>
+              </a:rPr>
+              <a:t>✓ Validated need for transformer-based approaches</a:t>
+            </a:r>
+          </a:p>
+          <a:p>
+            <a:pPr algn="l">
+              <a:spcBef>
+                <a:spcPts val="2250"/>
+              </a:spcBef>
+              <a:spcAft>
+                <a:spcPts val="1125"/>
+              </a:spcAft>
+              <a:buNone/>
+            </a:pPr>
+            <a:r>
+              <a:rPr lang="en-US" b="1" i="0" dirty="0">
+                <a:solidFill>
+                  <a:srgbClr val="667EEA"/>
+                </a:solidFill>
+                <a:effectLst/>
+                <a:latin typeface="Segoe UI" panose="020B0502040204020203" pitchFamily="34" charset="0"/>
+              </a:rPr>
+              <a:t>Broader Impact</a:t>
+            </a:r>
+          </a:p>
+          <a:p>
+            <a:pPr algn="l">
+              <a:spcBef>
+                <a:spcPts val="1500"/>
+              </a:spcBef>
+              <a:spcAft>
+                <a:spcPts val="1500"/>
+              </a:spcAft>
+              <a:buNone/>
+            </a:pPr>
+            <a:r>
+              <a:rPr lang="en-US" b="0" i="0" dirty="0">
+                <a:solidFill>
+                  <a:srgbClr val="000000"/>
+                </a:solidFill>
+                <a:effectLst/>
+                <a:latin typeface="Segoe UI" panose="020B0502040204020203" pitchFamily="34" charset="0"/>
+              </a:rPr>
+              <a:t>Enables positive content moderation, mental health support systems, and community resilience monitoring for </a:t>
+            </a:r>
+            <a:r>
+              <a:rPr lang="en-US" b="1" i="0" dirty="0">
+                <a:solidFill>
+                  <a:srgbClr val="000000"/>
+                </a:solidFill>
+                <a:effectLst/>
+                <a:latin typeface="Segoe UI" panose="020B0502040204020203" pitchFamily="34" charset="0"/>
+              </a:rPr>
+              <a:t>non-English speaking populations</a:t>
+            </a:r>
+            <a:endParaRPr lang="en-US" b="0" i="0" dirty="0">
+              <a:solidFill>
+                <a:srgbClr val="000000"/>
+              </a:solidFill>
+              <a:effectLst/>
+              <a:latin typeface="Segoe UI" panose="020B0502040204020203" pitchFamily="34" charset="0"/>
+            </a:endParaRPr>
           </a:p>
         </p:txBody>
       </p:sp>
     </p:spTree>
     <p:extLst>
       <p:ext uri="{BB962C8B-B14F-4D97-AF65-F5344CB8AC3E}">
-        <p14:creationId xmlns:p14="http://schemas.microsoft.com/office/powerpoint/2010/main" val="2108753062"/>
+        <p14:creationId xmlns:p14="http://schemas.microsoft.com/office/powerpoint/2010/main" val="1160568263"/>
       </p:ext>
     </p:extLst>
   </p:cSld>
@@ -6988,7 +6730,7 @@
           <p:cNvPr id="2" name="TextBox 1">
             <a:extLst>
               <a:ext uri="{FF2B5EF4-FFF2-40B4-BE49-F238E27FC236}">
-                <a16:creationId xmlns:a16="http://schemas.microsoft.com/office/drawing/2014/main" id="{3AEFC482-FEDC-4CD5-4570-B1E55EC9E699}"/>
+                <a16:creationId xmlns:a16="http://schemas.microsoft.com/office/drawing/2014/main" id="{FFD21A37-C749-BC73-E05A-67AD74098C63}"/>
               </a:ext>
             </a:extLst>
           </p:cNvPr>
@@ -6997,8 +6739,8 @@
         </p:nvSpPr>
         <p:spPr>
           <a:xfrm>
-            <a:off x="3463610" y="3044279"/>
-            <a:ext cx="5264780" cy="769441"/>
+            <a:off x="493846" y="265553"/>
+            <a:ext cx="1383815" cy="369332"/>
           </a:xfrm>
           <a:prstGeom prst="rect">
             <a:avLst/>
@@ -7018,15 +6760,15 @@
               <a:buNone/>
             </a:pPr>
             <a:r>
-              <a:rPr lang="en-US" sz="4400" b="1" dirty="0">
+              <a:rPr lang="en-US" b="1" dirty="0">
                 <a:solidFill>
                   <a:srgbClr val="764BA2"/>
                 </a:solidFill>
                 <a:latin typeface="Segoe UI" panose="020B0502040204020203" pitchFamily="34" charset="0"/>
               </a:rPr>
-              <a:t>Code Presentation</a:t>
-            </a:r>
-            <a:endParaRPr lang="en-US" sz="4400" b="1" i="0" dirty="0">
+              <a:t>References</a:t>
+            </a:r>
+            <a:endParaRPr lang="en-US" b="1" i="0" dirty="0">
               <a:solidFill>
                 <a:srgbClr val="764BA2"/>
               </a:solidFill>
@@ -7036,10 +6778,178 @@
           </a:p>
         </p:txBody>
       </p:sp>
+      <p:sp>
+        <p:nvSpPr>
+          <p:cNvPr id="5" name="TextBox 4">
+            <a:extLst>
+              <a:ext uri="{FF2B5EF4-FFF2-40B4-BE49-F238E27FC236}">
+                <a16:creationId xmlns:a16="http://schemas.microsoft.com/office/drawing/2014/main" id="{46B8FD1C-4405-BE02-855B-41BE3EADEF81}"/>
+              </a:ext>
+            </a:extLst>
+          </p:cNvPr>
+          <p:cNvSpPr txBox="1"/>
+          <p:nvPr/>
+        </p:nvSpPr>
+        <p:spPr>
+          <a:xfrm>
+            <a:off x="1387887" y="1028343"/>
+            <a:ext cx="9416226" cy="4801314"/>
+          </a:xfrm>
+          <a:prstGeom prst="rect">
+            <a:avLst/>
+          </a:prstGeom>
+          <a:noFill/>
+        </p:spPr>
+        <p:txBody>
+          <a:bodyPr wrap="square">
+            <a:spAutoFit/>
+          </a:bodyPr>
+          <a:lstStyle/>
+          <a:p>
+            <a:pPr>
+              <a:buNone/>
+            </a:pPr>
+            <a:r>
+              <a:rPr lang="en-US" dirty="0"/>
+              <a:t>[1] T. Davidson, D. Warmsley, M. Macy, and I. Weber, "Automated hate speech detection and the problem of offensive language," in </a:t>
+            </a:r>
+            <a:r>
+              <a:rPr lang="en-US" i="1" dirty="0"/>
+              <a:t>Proc. ICWSM</a:t>
+            </a:r>
+            <a:r>
+              <a:rPr lang="en-US" dirty="0"/>
+              <a:t>, 2017, pp. 512-515. </a:t>
+            </a:r>
+          </a:p>
+          <a:p>
+            <a:pPr>
+              <a:buNone/>
+            </a:pPr>
+            <a:endParaRPr lang="en-US" dirty="0"/>
+          </a:p>
+          <a:p>
+            <a:pPr>
+              <a:buNone/>
+            </a:pPr>
+            <a:r>
+              <a:rPr lang="en-US" dirty="0"/>
+              <a:t>[2] B. R. Chakravarthi et al., "Overview of the shared task on hope speech detection for equality, diversity, and inclusion," in </a:t>
+            </a:r>
+            <a:r>
+              <a:rPr lang="en-US" i="1" dirty="0"/>
+              <a:t>Proc. EACL Workshop</a:t>
+            </a:r>
+            <a:r>
+              <a:rPr lang="en-US" dirty="0"/>
+              <a:t>, 2021, pp. 61-72.</a:t>
+            </a:r>
+          </a:p>
+          <a:p>
+            <a:pPr>
+              <a:buNone/>
+            </a:pPr>
+            <a:endParaRPr lang="en-US" dirty="0"/>
+          </a:p>
+          <a:p>
+            <a:pPr>
+              <a:buNone/>
+            </a:pPr>
+            <a:r>
+              <a:rPr lang="en-US" dirty="0"/>
+              <a:t>[3] J. Devlin, M.-W. Chang, K. Lee, and K. Toutanova, "BERT: Pre-training of deep bidirectional transformers for language understanding," in </a:t>
+            </a:r>
+            <a:r>
+              <a:rPr lang="en-US" i="1" dirty="0"/>
+              <a:t>Proc. NAACL-HLT</a:t>
+            </a:r>
+            <a:r>
+              <a:rPr lang="en-US" dirty="0"/>
+              <a:t>, 2019, pp. 4171-4186.</a:t>
+            </a:r>
+          </a:p>
+          <a:p>
+            <a:pPr>
+              <a:buNone/>
+            </a:pPr>
+            <a:endParaRPr lang="en-US" dirty="0"/>
+          </a:p>
+          <a:p>
+            <a:pPr>
+              <a:buNone/>
+            </a:pPr>
+            <a:r>
+              <a:rPr lang="en-US" dirty="0"/>
+              <a:t>[4] A. </a:t>
+            </a:r>
+            <a:r>
+              <a:rPr lang="en-US" dirty="0" err="1"/>
+              <a:t>Conneau</a:t>
+            </a:r>
+            <a:r>
+              <a:rPr lang="en-US" dirty="0"/>
+              <a:t> et al., "Unsupervised cross-lingual representation learning at scale," in </a:t>
+            </a:r>
+            <a:r>
+              <a:rPr lang="en-US" i="1" dirty="0"/>
+              <a:t>Proc. ACL</a:t>
+            </a:r>
+            <a:r>
+              <a:rPr lang="en-US" dirty="0"/>
+              <a:t>, 2020, pp. 8440-8451.</a:t>
+            </a:r>
+          </a:p>
+          <a:p>
+            <a:pPr>
+              <a:buNone/>
+            </a:pPr>
+            <a:endParaRPr lang="en-US" dirty="0"/>
+          </a:p>
+          <a:p>
+            <a:pPr>
+              <a:buNone/>
+            </a:pPr>
+            <a:r>
+              <a:rPr lang="en-US" dirty="0"/>
+              <a:t>[5] S. Quintero and J. Long, "Toxic positivity: The dark side of positive vibes," </a:t>
+            </a:r>
+            <a:r>
+              <a:rPr lang="en-US" i="1" dirty="0"/>
+              <a:t>The Psychology Group</a:t>
+            </a:r>
+            <a:r>
+              <a:rPr lang="en-US" dirty="0"/>
+              <a:t>, vol. 12, no. 3, pp. 1-8, 2020.</a:t>
+            </a:r>
+          </a:p>
+          <a:p>
+            <a:pPr>
+              <a:buNone/>
+            </a:pPr>
+            <a:endParaRPr lang="en-US" dirty="0"/>
+          </a:p>
+          <a:p>
+            <a:pPr>
+              <a:buNone/>
+            </a:pPr>
+            <a:r>
+              <a:rPr lang="en-US" dirty="0"/>
+              <a:t>[6] Jigsaw and Google, "Toxic Comment Classification Challenge," Kaggle, 2017. [Online]. Available: </a:t>
+            </a:r>
+            <a:r>
+              <a:rPr lang="en-US" dirty="0">
+                <a:hlinkClick r:id="rId2"/>
+              </a:rPr>
+              <a:t>https://www.kaggle.com/c/jigsaw-toxic-comment-classification-challenge</a:t>
+            </a:r>
+            <a:endParaRPr lang="en-US" dirty="0"/>
+          </a:p>
+        </p:txBody>
+      </p:sp>
     </p:spTree>
     <p:extLst>
       <p:ext uri="{BB962C8B-B14F-4D97-AF65-F5344CB8AC3E}">
-        <p14:creationId xmlns:p14="http://schemas.microsoft.com/office/powerpoint/2010/main" val="3857259330"/>
+        <p14:creationId xmlns:p14="http://schemas.microsoft.com/office/powerpoint/2010/main" val="3093629697"/>
       </p:ext>
     </p:extLst>
   </p:cSld>
@@ -7050,455 +6960,6 @@
 </file>
 
 <file path=ppt/slides/slide17.xml><?xml version="1.0" encoding="utf-8"?>
-<p:sld xmlns:a="http://schemas.openxmlformats.org/drawingml/2006/main" xmlns:r="http://schemas.openxmlformats.org/officeDocument/2006/relationships" xmlns:p="http://schemas.openxmlformats.org/presentationml/2006/main">
-  <p:cSld>
-    <p:spTree>
-      <p:nvGrpSpPr>
-        <p:cNvPr id="1" name="">
-          <a:extLst>
-            <a:ext uri="{FF2B5EF4-FFF2-40B4-BE49-F238E27FC236}">
-              <a16:creationId xmlns:a16="http://schemas.microsoft.com/office/drawing/2014/main" id="{21F55901-F0D9-B880-CCD6-0AA470350F9F}"/>
-            </a:ext>
-          </a:extLst>
-        </p:cNvPr>
-        <p:cNvGrpSpPr/>
-        <p:nvPr/>
-      </p:nvGrpSpPr>
-      <p:grpSpPr>
-        <a:xfrm>
-          <a:off x="0" y="0"/>
-          <a:ext cx="0" cy="0"/>
-          <a:chOff x="0" y="0"/>
-          <a:chExt cx="0" cy="0"/>
-        </a:xfrm>
-      </p:grpSpPr>
-      <p:sp>
-        <p:nvSpPr>
-          <p:cNvPr id="3" name="TextBox 2">
-            <a:extLst>
-              <a:ext uri="{FF2B5EF4-FFF2-40B4-BE49-F238E27FC236}">
-                <a16:creationId xmlns:a16="http://schemas.microsoft.com/office/drawing/2014/main" id="{F3775BCC-746B-30DB-8E8D-C4949871CCC3}"/>
-              </a:ext>
-            </a:extLst>
-          </p:cNvPr>
-          <p:cNvSpPr txBox="1"/>
-          <p:nvPr/>
-        </p:nvSpPr>
-        <p:spPr>
-          <a:xfrm>
-            <a:off x="507807" y="460998"/>
-            <a:ext cx="3903650" cy="369332"/>
-          </a:xfrm>
-          <a:prstGeom prst="rect">
-            <a:avLst/>
-          </a:prstGeom>
-          <a:noFill/>
-        </p:spPr>
-        <p:txBody>
-          <a:bodyPr wrap="square">
-            <a:spAutoFit/>
-          </a:bodyPr>
-          <a:lstStyle/>
-          <a:p>
-            <a:pPr algn="l">
-              <a:spcAft>
-                <a:spcPts val="2250"/>
-              </a:spcAft>
-              <a:buNone/>
-            </a:pPr>
-            <a:r>
-              <a:rPr lang="en-US" b="1" i="0" dirty="0">
-                <a:solidFill>
-                  <a:srgbClr val="764BA2"/>
-                </a:solidFill>
-                <a:effectLst/>
-                <a:latin typeface="Segoe UI" panose="020B0502040204020203" pitchFamily="34" charset="0"/>
-              </a:rPr>
-              <a:t>Future Work (Next Semester) 🔮</a:t>
-            </a:r>
-          </a:p>
-        </p:txBody>
-      </p:sp>
-      <p:sp>
-        <p:nvSpPr>
-          <p:cNvPr id="5" name="TextBox 4">
-            <a:extLst>
-              <a:ext uri="{FF2B5EF4-FFF2-40B4-BE49-F238E27FC236}">
-                <a16:creationId xmlns:a16="http://schemas.microsoft.com/office/drawing/2014/main" id="{B0E95C94-3B98-8867-6CBA-75511066795A}"/>
-              </a:ext>
-            </a:extLst>
-          </p:cNvPr>
-          <p:cNvSpPr txBox="1"/>
-          <p:nvPr/>
-        </p:nvSpPr>
-        <p:spPr>
-          <a:xfrm>
-            <a:off x="3047419" y="1305341"/>
-            <a:ext cx="6097162" cy="4247317"/>
-          </a:xfrm>
-          <a:prstGeom prst="rect">
-            <a:avLst/>
-          </a:prstGeom>
-          <a:noFill/>
-        </p:spPr>
-        <p:txBody>
-          <a:bodyPr wrap="square">
-            <a:spAutoFit/>
-          </a:bodyPr>
-          <a:lstStyle/>
-          <a:p>
-            <a:r>
-              <a:rPr lang="en-US" b="1" dirty="0"/>
-              <a:t>1. Large-Scale YouTube Scraping</a:t>
-            </a:r>
-          </a:p>
-          <a:p>
-            <a:r>
-              <a:rPr lang="en-US" dirty="0"/>
-              <a:t>Automated extraction of 10k+ comments in Telugu, Tamil, Malayalam from motivational videos, mental health channels, devotional content</a:t>
-            </a:r>
-          </a:p>
-          <a:p>
-            <a:endParaRPr lang="en-US" dirty="0"/>
-          </a:p>
-          <a:p>
-            <a:r>
-              <a:rPr lang="en-US" b="1" dirty="0"/>
-              <a:t>2. Multilingual Annotation Guidelines</a:t>
-            </a:r>
-          </a:p>
-          <a:p>
-            <a:r>
-              <a:rPr lang="en-US" dirty="0"/>
-              <a:t>Consistent labeling framework for hope, non-hope, toxic positivity across languages</a:t>
-            </a:r>
-          </a:p>
-          <a:p>
-            <a:endParaRPr lang="en-US" dirty="0"/>
-          </a:p>
-          <a:p>
-            <a:r>
-              <a:rPr lang="en-US" b="1" dirty="0"/>
-              <a:t>3. Transformer Fine-tuning</a:t>
-            </a:r>
-          </a:p>
-          <a:p>
-            <a:r>
-              <a:rPr lang="en-US" dirty="0"/>
-              <a:t>XLM-Roberta / </a:t>
-            </a:r>
-            <a:r>
-              <a:rPr lang="en-US" dirty="0" err="1"/>
-              <a:t>mBERT</a:t>
-            </a:r>
-            <a:r>
-              <a:rPr lang="en-US" dirty="0"/>
-              <a:t> training on combined datasets</a:t>
-            </a:r>
-          </a:p>
-          <a:p>
-            <a:endParaRPr lang="en-US" dirty="0"/>
-          </a:p>
-          <a:p>
-            <a:r>
-              <a:rPr lang="en-US" b="1" dirty="0"/>
-              <a:t>4. Toxic Positivity Dataset Expansion</a:t>
-            </a:r>
-          </a:p>
-          <a:p>
-            <a:r>
-              <a:rPr lang="en-US" dirty="0"/>
-              <a:t>Especially for Tamil and Malayalam (currently underrepresented)</a:t>
-            </a:r>
-          </a:p>
-        </p:txBody>
-      </p:sp>
-    </p:spTree>
-    <p:extLst>
-      <p:ext uri="{BB962C8B-B14F-4D97-AF65-F5344CB8AC3E}">
-        <p14:creationId xmlns:p14="http://schemas.microsoft.com/office/powerpoint/2010/main" val="890269783"/>
-      </p:ext>
-    </p:extLst>
-  </p:cSld>
-  <p:clrMapOvr>
-    <a:masterClrMapping/>
-  </p:clrMapOvr>
-</p:sld>
-</file>
-
-<file path=ppt/slides/slide18.xml><?xml version="1.0" encoding="utf-8"?>
-<p:sld xmlns:a="http://schemas.openxmlformats.org/drawingml/2006/main" xmlns:r="http://schemas.openxmlformats.org/officeDocument/2006/relationships" xmlns:p="http://schemas.openxmlformats.org/presentationml/2006/main">
-  <p:cSld>
-    <p:spTree>
-      <p:nvGrpSpPr>
-        <p:cNvPr id="1" name="">
-          <a:extLst>
-            <a:ext uri="{FF2B5EF4-FFF2-40B4-BE49-F238E27FC236}">
-              <a16:creationId xmlns:a16="http://schemas.microsoft.com/office/drawing/2014/main" id="{534C1968-9123-423B-2EDF-7872102C3547}"/>
-            </a:ext>
-          </a:extLst>
-        </p:cNvPr>
-        <p:cNvGrpSpPr/>
-        <p:nvPr/>
-      </p:nvGrpSpPr>
-      <p:grpSpPr>
-        <a:xfrm>
-          <a:off x="0" y="0"/>
-          <a:ext cx="0" cy="0"/>
-          <a:chOff x="0" y="0"/>
-          <a:chExt cx="0" cy="0"/>
-        </a:xfrm>
-      </p:grpSpPr>
-      <p:sp>
-        <p:nvSpPr>
-          <p:cNvPr id="3" name="TextBox 2">
-            <a:extLst>
-              <a:ext uri="{FF2B5EF4-FFF2-40B4-BE49-F238E27FC236}">
-                <a16:creationId xmlns:a16="http://schemas.microsoft.com/office/drawing/2014/main" id="{D86C4F88-BB73-3DEF-D55C-727B9CE11004}"/>
-              </a:ext>
-            </a:extLst>
-          </p:cNvPr>
-          <p:cNvSpPr txBox="1"/>
-          <p:nvPr/>
-        </p:nvSpPr>
-        <p:spPr>
-          <a:xfrm>
-            <a:off x="493846" y="265553"/>
-            <a:ext cx="2884548" cy="369332"/>
-          </a:xfrm>
-          <a:prstGeom prst="rect">
-            <a:avLst/>
-          </a:prstGeom>
-          <a:noFill/>
-        </p:spPr>
-        <p:txBody>
-          <a:bodyPr wrap="square">
-            <a:spAutoFit/>
-          </a:bodyPr>
-          <a:lstStyle/>
-          <a:p>
-            <a:pPr algn="l">
-              <a:spcAft>
-                <a:spcPts val="2250"/>
-              </a:spcAft>
-              <a:buNone/>
-            </a:pPr>
-            <a:r>
-              <a:rPr lang="en-US" b="1" i="0" dirty="0">
-                <a:solidFill>
-                  <a:srgbClr val="764BA2"/>
-                </a:solidFill>
-                <a:effectLst/>
-                <a:latin typeface="Segoe UI" panose="020B0502040204020203" pitchFamily="34" charset="0"/>
-              </a:rPr>
-              <a:t>Conclusion &amp; Impact 🎯</a:t>
-            </a:r>
-          </a:p>
-        </p:txBody>
-      </p:sp>
-      <p:sp>
-        <p:nvSpPr>
-          <p:cNvPr id="7" name="TextBox 6">
-            <a:extLst>
-              <a:ext uri="{FF2B5EF4-FFF2-40B4-BE49-F238E27FC236}">
-                <a16:creationId xmlns:a16="http://schemas.microsoft.com/office/drawing/2014/main" id="{3E44A755-B126-5056-D9E0-AD4E28B1D75E}"/>
-              </a:ext>
-            </a:extLst>
-          </p:cNvPr>
-          <p:cNvSpPr txBox="1"/>
-          <p:nvPr/>
-        </p:nvSpPr>
-        <p:spPr>
-          <a:xfrm>
-            <a:off x="2214163" y="1187360"/>
-            <a:ext cx="7763674" cy="4483279"/>
-          </a:xfrm>
-          <a:prstGeom prst="rect">
-            <a:avLst/>
-          </a:prstGeom>
-          <a:noFill/>
-        </p:spPr>
-        <p:txBody>
-          <a:bodyPr wrap="square">
-            <a:spAutoFit/>
-          </a:bodyPr>
-          <a:lstStyle/>
-          <a:p>
-            <a:pPr algn="l">
-              <a:spcBef>
-                <a:spcPts val="1500"/>
-              </a:spcBef>
-              <a:spcAft>
-                <a:spcPts val="1125"/>
-              </a:spcAft>
-              <a:buNone/>
-            </a:pPr>
-            <a:r>
-              <a:rPr lang="en-US" b="1" i="0" dirty="0">
-                <a:solidFill>
-                  <a:srgbClr val="667EEA"/>
-                </a:solidFill>
-                <a:effectLst/>
-                <a:latin typeface="Segoe UI" panose="020B0502040204020203" pitchFamily="34" charset="0"/>
-              </a:rPr>
-              <a:t>Key Accomplishments</a:t>
-            </a:r>
-          </a:p>
-          <a:p>
-            <a:pPr algn="l">
-              <a:spcBef>
-                <a:spcPts val="1125"/>
-              </a:spcBef>
-              <a:spcAft>
-                <a:spcPts val="1125"/>
-              </a:spcAft>
-            </a:pPr>
-            <a:r>
-              <a:rPr lang="en-US" b="0" i="0" dirty="0">
-                <a:solidFill>
-                  <a:srgbClr val="000000"/>
-                </a:solidFill>
-                <a:effectLst/>
-                <a:latin typeface="Segoe UI" panose="020B0502040204020203" pitchFamily="34" charset="0"/>
-              </a:rPr>
-              <a:t>✓ Built complete preprocessing pipeline for multilingual hope speech</a:t>
-            </a:r>
-          </a:p>
-          <a:p>
-            <a:pPr algn="l">
-              <a:spcBef>
-                <a:spcPts val="1125"/>
-              </a:spcBef>
-              <a:spcAft>
-                <a:spcPts val="1125"/>
-              </a:spcAft>
-            </a:pPr>
-            <a:r>
-              <a:rPr lang="en-US" b="0" i="0" dirty="0">
-                <a:solidFill>
-                  <a:srgbClr val="000000"/>
-                </a:solidFill>
-                <a:effectLst/>
-                <a:latin typeface="Segoe UI" panose="020B0502040204020203" pitchFamily="34" charset="0"/>
-              </a:rPr>
-              <a:t>✓ Established baseline performance metrics (English: 80.4%, Tamil: 63.4%, Malayalam: 30.3%)</a:t>
-            </a:r>
-          </a:p>
-          <a:p>
-            <a:pPr algn="l">
-              <a:spcBef>
-                <a:spcPts val="1125"/>
-              </a:spcBef>
-              <a:spcAft>
-                <a:spcPts val="1125"/>
-              </a:spcAft>
-            </a:pPr>
-            <a:r>
-              <a:rPr lang="en-US" b="0" i="0" dirty="0">
-                <a:solidFill>
-                  <a:srgbClr val="000000"/>
-                </a:solidFill>
-                <a:effectLst/>
-                <a:latin typeface="Segoe UI" panose="020B0502040204020203" pitchFamily="34" charset="0"/>
-              </a:rPr>
-              <a:t>✓ Identified critical challenges: negation, code-mixing, toxic positivity</a:t>
-            </a:r>
-          </a:p>
-          <a:p>
-            <a:pPr algn="l">
-              <a:spcBef>
-                <a:spcPts val="1125"/>
-              </a:spcBef>
-              <a:spcAft>
-                <a:spcPts val="1125"/>
-              </a:spcAft>
-            </a:pPr>
-            <a:r>
-              <a:rPr lang="en-US" b="0" i="0" dirty="0">
-                <a:solidFill>
-                  <a:srgbClr val="000000"/>
-                </a:solidFill>
-                <a:effectLst/>
-                <a:latin typeface="Segoe UI" panose="020B0502040204020203" pitchFamily="34" charset="0"/>
-              </a:rPr>
-              <a:t>✓ Validated need for transformer-based approaches</a:t>
-            </a:r>
-          </a:p>
-          <a:p>
-            <a:pPr algn="l">
-              <a:spcBef>
-                <a:spcPts val="2250"/>
-              </a:spcBef>
-              <a:spcAft>
-                <a:spcPts val="1125"/>
-              </a:spcAft>
-              <a:buNone/>
-            </a:pPr>
-            <a:r>
-              <a:rPr lang="en-US" b="1" i="0" dirty="0">
-                <a:solidFill>
-                  <a:srgbClr val="667EEA"/>
-                </a:solidFill>
-                <a:effectLst/>
-                <a:latin typeface="Segoe UI" panose="020B0502040204020203" pitchFamily="34" charset="0"/>
-              </a:rPr>
-              <a:t>Broader Impact</a:t>
-            </a:r>
-          </a:p>
-          <a:p>
-            <a:pPr algn="l">
-              <a:spcBef>
-                <a:spcPts val="1500"/>
-              </a:spcBef>
-              <a:spcAft>
-                <a:spcPts val="1500"/>
-              </a:spcAft>
-              <a:buNone/>
-            </a:pPr>
-            <a:r>
-              <a:rPr lang="en-US" b="0" i="0" dirty="0">
-                <a:solidFill>
-                  <a:srgbClr val="000000"/>
-                </a:solidFill>
-                <a:effectLst/>
-                <a:latin typeface="Segoe UI" panose="020B0502040204020203" pitchFamily="34" charset="0"/>
-              </a:rPr>
-              <a:t>Enables positive content moderation, mental health support systems, and community resilience monitoring for </a:t>
-            </a:r>
-            <a:r>
-              <a:rPr lang="en-US" b="1" i="0" dirty="0">
-                <a:solidFill>
-                  <a:srgbClr val="000000"/>
-                </a:solidFill>
-                <a:effectLst/>
-                <a:latin typeface="Segoe UI" panose="020B0502040204020203" pitchFamily="34" charset="0"/>
-              </a:rPr>
-              <a:t>non-English speaking populations</a:t>
-            </a:r>
-            <a:endParaRPr lang="en-US" b="0" i="0" dirty="0">
-              <a:solidFill>
-                <a:srgbClr val="000000"/>
-              </a:solidFill>
-              <a:effectLst/>
-              <a:latin typeface="Segoe UI" panose="020B0502040204020203" pitchFamily="34" charset="0"/>
-            </a:endParaRPr>
-          </a:p>
-        </p:txBody>
-      </p:sp>
-    </p:spTree>
-    <p:extLst>
-      <p:ext uri="{BB962C8B-B14F-4D97-AF65-F5344CB8AC3E}">
-        <p14:creationId xmlns:p14="http://schemas.microsoft.com/office/powerpoint/2010/main" val="1160568263"/>
-      </p:ext>
-    </p:extLst>
-  </p:cSld>
-  <p:clrMapOvr>
-    <a:masterClrMapping/>
-  </p:clrMapOvr>
-</p:sld>
-</file>
-
-<file path=ppt/slides/slide19.xml><?xml version="1.0" encoding="utf-8"?>
 <p:sld xmlns:a="http://schemas.openxmlformats.org/drawingml/2006/main" xmlns:r="http://schemas.openxmlformats.org/officeDocument/2006/relationships" xmlns:p="http://schemas.openxmlformats.org/presentationml/2006/main">
   <p:cSld>
     <p:spTree>
@@ -7971,6 +7432,63 @@
           </a:p>
         </p:txBody>
       </p:sp>
+      <p:sp>
+        <p:nvSpPr>
+          <p:cNvPr id="2" name="TextBox 1">
+            <a:extLst>
+              <a:ext uri="{FF2B5EF4-FFF2-40B4-BE49-F238E27FC236}">
+                <a16:creationId xmlns:a16="http://schemas.microsoft.com/office/drawing/2014/main" id="{C2E4897A-714A-F316-7755-2C8DEC49A8BE}"/>
+              </a:ext>
+            </a:extLst>
+          </p:cNvPr>
+          <p:cNvSpPr txBox="1"/>
+          <p:nvPr/>
+        </p:nvSpPr>
+        <p:spPr>
+          <a:xfrm>
+            <a:off x="2524779" y="6198008"/>
+            <a:ext cx="7142441" cy="369332"/>
+          </a:xfrm>
+          <a:prstGeom prst="rect">
+            <a:avLst/>
+          </a:prstGeom>
+          <a:noFill/>
+          <a:ln>
+            <a:solidFill>
+              <a:schemeClr val="tx1"/>
+            </a:solidFill>
+          </a:ln>
+        </p:spPr>
+        <p:txBody>
+          <a:bodyPr wrap="square">
+            <a:spAutoFit/>
+          </a:bodyPr>
+          <a:lstStyle/>
+          <a:p>
+            <a:r>
+              <a:rPr lang="en-US" b="1" i="0" dirty="0">
+                <a:solidFill>
+                  <a:srgbClr val="000000"/>
+                </a:solidFill>
+                <a:effectLst/>
+                <a:latin typeface="Segoe UI" panose="020B0502040204020203" pitchFamily="34" charset="0"/>
+              </a:rPr>
+              <a:t>Key Insight:</a:t>
+            </a:r>
+            <a:r>
+              <a:rPr lang="en-US" b="0" i="0" dirty="0">
+                <a:solidFill>
+                  <a:srgbClr val="000000"/>
+                </a:solidFill>
+                <a:effectLst/>
+                <a:latin typeface="Segoe UI" panose="020B0502040204020203" pitchFamily="34" charset="0"/>
+              </a:rPr>
+              <a:t> Hope speech is NOT just the opposite of hate speech!</a:t>
+            </a:r>
+            <a:endParaRPr lang="en-US" dirty="0"/>
+          </a:p>
+        </p:txBody>
+      </p:sp>
     </p:spTree>
     <p:extLst>
       <p:ext uri="{BB962C8B-B14F-4D97-AF65-F5344CB8AC3E}">
@@ -8204,7 +7722,7 @@
                 <a:effectLst/>
                 <a:latin typeface="Segoe UI" panose="020B0502040204020203" pitchFamily="34" charset="0"/>
               </a:rPr>
-              <a:t>aayi</a:t>
+              <a:t>ayya</a:t>
             </a:r>
             <a:r>
               <a:rPr lang="en-US" b="0" i="0" dirty="0">
@@ -8329,58 +7847,6 @@
               </a:rPr>
               <a:t> Sounds positive but invalidates feelings</a:t>
             </a:r>
-          </a:p>
-        </p:txBody>
-      </p:sp>
-      <p:sp>
-        <p:nvSpPr>
-          <p:cNvPr id="7" name="TextBox 6">
-            <a:extLst>
-              <a:ext uri="{FF2B5EF4-FFF2-40B4-BE49-F238E27FC236}">
-                <a16:creationId xmlns:a16="http://schemas.microsoft.com/office/drawing/2014/main" id="{C2E4897A-714A-F316-7755-2C8DEC49A8BE}"/>
-              </a:ext>
-            </a:extLst>
-          </p:cNvPr>
-          <p:cNvSpPr txBox="1"/>
-          <p:nvPr/>
-        </p:nvSpPr>
-        <p:spPr>
-          <a:xfrm>
-            <a:off x="3048582" y="5767018"/>
-            <a:ext cx="6097162" cy="646331"/>
-          </a:xfrm>
-          <a:prstGeom prst="rect">
-            <a:avLst/>
-          </a:prstGeom>
-          <a:noFill/>
-        </p:spPr>
-        <p:txBody>
-          <a:bodyPr wrap="square">
-            <a:spAutoFit/>
-          </a:bodyPr>
-          <a:lstStyle/>
-          <a:p>
-            <a:r>
-              <a:rPr lang="en-US" b="1" i="0" dirty="0">
-                <a:solidFill>
-                  <a:srgbClr val="000000"/>
-                </a:solidFill>
-                <a:effectLst/>
-                <a:latin typeface="Segoe UI" panose="020B0502040204020203" pitchFamily="34" charset="0"/>
-              </a:rPr>
-              <a:t>Key Insight:</a:t>
-            </a:r>
-            <a:r>
-              <a:rPr lang="en-US" b="0" i="0" dirty="0">
-                <a:solidFill>
-                  <a:srgbClr val="000000"/>
-                </a:solidFill>
-                <a:effectLst/>
-                <a:latin typeface="Segoe UI" panose="020B0502040204020203" pitchFamily="34" charset="0"/>
-              </a:rPr>
-              <a:t> Hope speech is NOT just the opposite of hate speech!</a:t>
-            </a:r>
-            <a:endParaRPr lang="en-US" dirty="0"/>
           </a:p>
         </p:txBody>
       </p:sp>
@@ -10148,13 +9614,7 @@
   <p:cSld>
     <p:spTree>
       <p:nvGrpSpPr>
-        <p:cNvPr id="1" name="">
-          <a:extLst>
-            <a:ext uri="{FF2B5EF4-FFF2-40B4-BE49-F238E27FC236}">
-              <a16:creationId xmlns:a16="http://schemas.microsoft.com/office/drawing/2014/main" id="{C2FEB88A-E907-C135-3104-4EF8700FA292}"/>
-            </a:ext>
-          </a:extLst>
-        </p:cNvPr>
+        <p:cNvPr id="1" name=""/>
         <p:cNvGrpSpPr/>
         <p:nvPr/>
       </p:nvGrpSpPr>
@@ -10168,10 +9628,10 @@
       </p:grpSpPr>
       <p:sp>
         <p:nvSpPr>
-          <p:cNvPr id="12" name="TextBox 11">
-            <a:extLst>
-              <a:ext uri="{FF2B5EF4-FFF2-40B4-BE49-F238E27FC236}">
-                <a16:creationId xmlns:a16="http://schemas.microsoft.com/office/drawing/2014/main" id="{68437EC7-A1F5-7EE2-8ACB-3D8B61AAC21F}"/>
+          <p:cNvPr id="2" name="TextBox 1">
+            <a:extLst>
+              <a:ext uri="{FF2B5EF4-FFF2-40B4-BE49-F238E27FC236}">
+                <a16:creationId xmlns:a16="http://schemas.microsoft.com/office/drawing/2014/main" id="{3AEFC482-FEDC-4CD5-4570-B1E55EC9E699}"/>
               </a:ext>
             </a:extLst>
           </p:cNvPr>
@@ -10180,8 +9640,8 @@
         </p:nvSpPr>
         <p:spPr>
           <a:xfrm>
-            <a:off x="493846" y="441547"/>
-            <a:ext cx="3826868" cy="369332"/>
+            <a:off x="3463610" y="3044279"/>
+            <a:ext cx="5264780" cy="769441"/>
           </a:xfrm>
           <a:prstGeom prst="rect">
             <a:avLst/>
@@ -10201,308 +9661,28 @@
               <a:buNone/>
             </a:pPr>
             <a:r>
-              <a:rPr lang="en-US" b="1" i="0" dirty="0">
+              <a:rPr lang="en-US" sz="4400" b="1" dirty="0">
                 <a:solidFill>
                   <a:srgbClr val="764BA2"/>
                 </a:solidFill>
-                <a:effectLst/>
-                <a:latin typeface="Segoe UI" panose="020B0502040204020203" pitchFamily="34" charset="0"/>
-              </a:rPr>
-              <a:t>System Architecture Overview 🏗️</a:t>
-            </a:r>
-          </a:p>
-        </p:txBody>
-      </p:sp>
-      <p:sp>
-        <p:nvSpPr>
-          <p:cNvPr id="11" name="TextBox 10">
-            <a:extLst>
-              <a:ext uri="{FF2B5EF4-FFF2-40B4-BE49-F238E27FC236}">
-                <a16:creationId xmlns:a16="http://schemas.microsoft.com/office/drawing/2014/main" id="{C1058A26-B0AE-9FC8-D93F-BF2AF80408A7}"/>
-              </a:ext>
-            </a:extLst>
-          </p:cNvPr>
-          <p:cNvSpPr txBox="1"/>
-          <p:nvPr/>
-        </p:nvSpPr>
-        <p:spPr>
-          <a:xfrm>
-            <a:off x="1492008" y="1908762"/>
-            <a:ext cx="3463900" cy="2387833"/>
-          </a:xfrm>
-          <a:prstGeom prst="rect">
-            <a:avLst/>
-          </a:prstGeom>
-          <a:noFill/>
-          <a:ln>
-            <a:solidFill>
-              <a:schemeClr val="tx1"/>
-            </a:solidFill>
-          </a:ln>
-        </p:spPr>
-        <p:txBody>
-          <a:bodyPr wrap="square">
-            <a:spAutoFit/>
-          </a:bodyPr>
-          <a:lstStyle/>
-          <a:p>
-            <a:pPr algn="l">
-              <a:spcBef>
-                <a:spcPts val="1125"/>
-              </a:spcBef>
-              <a:spcAft>
-                <a:spcPts val="750"/>
-              </a:spcAft>
-              <a:buNone/>
-            </a:pPr>
-            <a:r>
-              <a:rPr lang="en-US" b="1" i="0" dirty="0">
-                <a:solidFill>
-                  <a:srgbClr val="667EEA"/>
-                </a:solidFill>
-                <a:effectLst/>
-                <a:latin typeface="Segoe UI" panose="020B0502040204020203" pitchFamily="34" charset="0"/>
-              </a:rPr>
-              <a:t>✅ Completed This Semester</a:t>
-            </a:r>
-          </a:p>
-          <a:p>
-            <a:pPr algn="l">
-              <a:spcBef>
-                <a:spcPts val="900"/>
-              </a:spcBef>
-              <a:spcAft>
-                <a:spcPts val="900"/>
-              </a:spcAft>
-              <a:buFont typeface="Arial" panose="020B0604020202020204" pitchFamily="34" charset="0"/>
-              <a:buChar char="•"/>
-            </a:pPr>
-            <a:r>
-              <a:rPr lang="en-US" b="0" i="0" dirty="0">
-                <a:solidFill>
-                  <a:srgbClr val="000000"/>
-                </a:solidFill>
-                <a:effectLst/>
-                <a:latin typeface="Segoe UI" panose="020B0502040204020203" pitchFamily="34" charset="0"/>
-              </a:rPr>
-              <a:t>Data integration layer</a:t>
-            </a:r>
-          </a:p>
-          <a:p>
-            <a:pPr algn="l">
-              <a:spcBef>
-                <a:spcPts val="900"/>
-              </a:spcBef>
-              <a:spcAft>
-                <a:spcPts val="900"/>
-              </a:spcAft>
-              <a:buFont typeface="Arial" panose="020B0604020202020204" pitchFamily="34" charset="0"/>
-              <a:buChar char="•"/>
-            </a:pPr>
-            <a:r>
-              <a:rPr lang="en-US" b="0" i="0" dirty="0">
-                <a:solidFill>
-                  <a:srgbClr val="000000"/>
-                </a:solidFill>
-                <a:effectLst/>
-                <a:latin typeface="Segoe UI" panose="020B0502040204020203" pitchFamily="34" charset="0"/>
-              </a:rPr>
-              <a:t>Preprocessing pipeline</a:t>
-            </a:r>
-          </a:p>
-          <a:p>
-            <a:pPr algn="l">
-              <a:spcBef>
-                <a:spcPts val="900"/>
-              </a:spcBef>
-              <a:spcAft>
-                <a:spcPts val="900"/>
-              </a:spcAft>
-              <a:buFont typeface="Arial" panose="020B0604020202020204" pitchFamily="34" charset="0"/>
-              <a:buChar char="•"/>
-            </a:pPr>
-            <a:r>
-              <a:rPr lang="en-US" b="0" i="0" dirty="0">
-                <a:solidFill>
-                  <a:srgbClr val="000000"/>
-                </a:solidFill>
-                <a:effectLst/>
-                <a:latin typeface="Segoe UI" panose="020B0502040204020203" pitchFamily="34" charset="0"/>
-              </a:rPr>
-              <a:t>TF-IDF baseline model</a:t>
-            </a:r>
-          </a:p>
-          <a:p>
-            <a:pPr algn="l">
-              <a:spcBef>
-                <a:spcPts val="900"/>
-              </a:spcBef>
-              <a:spcAft>
-                <a:spcPts val="900"/>
-              </a:spcAft>
-              <a:buFont typeface="Arial" panose="020B0604020202020204" pitchFamily="34" charset="0"/>
-              <a:buChar char="•"/>
-            </a:pPr>
-            <a:r>
-              <a:rPr lang="en-US" b="0" i="0" dirty="0">
-                <a:solidFill>
-                  <a:srgbClr val="000000"/>
-                </a:solidFill>
-                <a:effectLst/>
-                <a:latin typeface="Segoe UI" panose="020B0502040204020203" pitchFamily="34" charset="0"/>
-              </a:rPr>
-              <a:t>Evaluation framework</a:t>
-            </a:r>
-          </a:p>
-        </p:txBody>
-      </p:sp>
-      <p:sp>
-        <p:nvSpPr>
-          <p:cNvPr id="18" name="TextBox 17">
-            <a:extLst>
-              <a:ext uri="{FF2B5EF4-FFF2-40B4-BE49-F238E27FC236}">
-                <a16:creationId xmlns:a16="http://schemas.microsoft.com/office/drawing/2014/main" id="{9BDE544B-9EDC-AFC6-B4FF-8EA15103C36B}"/>
-              </a:ext>
-            </a:extLst>
-          </p:cNvPr>
-          <p:cNvSpPr txBox="1"/>
-          <p:nvPr/>
-        </p:nvSpPr>
-        <p:spPr>
-          <a:xfrm>
-            <a:off x="6343214" y="1908761"/>
-            <a:ext cx="3387119" cy="2387833"/>
-          </a:xfrm>
-          <a:prstGeom prst="rect">
-            <a:avLst/>
-          </a:prstGeom>
-          <a:noFill/>
-          <a:ln>
-            <a:solidFill>
-              <a:schemeClr val="tx1"/>
-            </a:solidFill>
-          </a:ln>
-        </p:spPr>
-        <p:txBody>
-          <a:bodyPr wrap="square">
-            <a:spAutoFit/>
-          </a:bodyPr>
-          <a:lstStyle/>
-          <a:p>
-            <a:pPr algn="l">
-              <a:spcBef>
-                <a:spcPts val="1125"/>
-              </a:spcBef>
-              <a:spcAft>
-                <a:spcPts val="750"/>
-              </a:spcAft>
-              <a:buNone/>
-            </a:pPr>
-            <a:r>
-              <a:rPr lang="en-US" b="1" i="0" dirty="0">
-                <a:solidFill>
-                  <a:srgbClr val="667EEA"/>
-                </a:solidFill>
-                <a:effectLst/>
-                <a:latin typeface="Segoe UI" panose="020B0502040204020203" pitchFamily="34" charset="0"/>
-              </a:rPr>
-              <a:t>🚀 Planned Next Semester</a:t>
-            </a:r>
-          </a:p>
-          <a:p>
-            <a:pPr algn="l">
-              <a:spcBef>
-                <a:spcPts val="900"/>
-              </a:spcBef>
-              <a:spcAft>
-                <a:spcPts val="900"/>
-              </a:spcAft>
-              <a:buFont typeface="Arial" panose="020B0604020202020204" pitchFamily="34" charset="0"/>
-              <a:buChar char="•"/>
-            </a:pPr>
-            <a:r>
-              <a:rPr lang="en-US" b="0" i="0" dirty="0">
-                <a:solidFill>
-                  <a:srgbClr val="000000"/>
-                </a:solidFill>
-                <a:effectLst/>
-                <a:latin typeface="Segoe UI" panose="020B0502040204020203" pitchFamily="34" charset="0"/>
-              </a:rPr>
-              <a:t>XLM-Roberta fine-tuning</a:t>
-            </a:r>
-          </a:p>
-          <a:p>
-            <a:pPr algn="l">
-              <a:spcBef>
-                <a:spcPts val="900"/>
-              </a:spcBef>
-              <a:spcAft>
-                <a:spcPts val="900"/>
-              </a:spcAft>
-              <a:buFont typeface="Arial" panose="020B0604020202020204" pitchFamily="34" charset="0"/>
-              <a:buChar char="•"/>
-            </a:pPr>
-            <a:r>
-              <a:rPr lang="en-US" b="0" i="0" dirty="0">
-                <a:solidFill>
-                  <a:srgbClr val="000000"/>
-                </a:solidFill>
-                <a:effectLst/>
-                <a:latin typeface="Segoe UI" panose="020B0502040204020203" pitchFamily="34" charset="0"/>
-              </a:rPr>
-              <a:t>YouTube scraping automation</a:t>
-            </a:r>
-          </a:p>
-          <a:p>
-            <a:pPr algn="l">
-              <a:spcBef>
-                <a:spcPts val="900"/>
-              </a:spcBef>
-              <a:spcAft>
-                <a:spcPts val="900"/>
-              </a:spcAft>
-              <a:buFont typeface="Arial" panose="020B0604020202020204" pitchFamily="34" charset="0"/>
-              <a:buChar char="•"/>
-            </a:pPr>
-            <a:r>
-              <a:rPr lang="en-US" b="0" i="0" dirty="0">
-                <a:solidFill>
-                  <a:srgbClr val="000000"/>
-                </a:solidFill>
-                <a:effectLst/>
-                <a:latin typeface="Segoe UI" panose="020B0502040204020203" pitchFamily="34" charset="0"/>
-              </a:rPr>
-              <a:t>Multilingual annotation</a:t>
-            </a:r>
-          </a:p>
-          <a:p>
-            <a:pPr algn="l">
-              <a:spcBef>
-                <a:spcPts val="900"/>
-              </a:spcBef>
-              <a:spcAft>
-                <a:spcPts val="900"/>
-              </a:spcAft>
-              <a:buFont typeface="Arial" panose="020B0604020202020204" pitchFamily="34" charset="0"/>
-              <a:buChar char="•"/>
-            </a:pPr>
-            <a:r>
-              <a:rPr lang="en-US" b="0" i="0" dirty="0">
-                <a:solidFill>
-                  <a:srgbClr val="000000"/>
-                </a:solidFill>
-                <a:effectLst/>
-                <a:latin typeface="Segoe UI" panose="020B0502040204020203" pitchFamily="34" charset="0"/>
-              </a:rPr>
-              <a:t>Real-time deployment</a:t>
-            </a:r>
+                <a:latin typeface="Segoe UI" panose="020B0502040204020203" pitchFamily="34" charset="0"/>
+              </a:rPr>
+              <a:t>Code Presentation</a:t>
+            </a:r>
+            <a:endParaRPr lang="en-US" sz="4400" b="1" i="0" dirty="0">
+              <a:solidFill>
+                <a:srgbClr val="764BA2"/>
+              </a:solidFill>
+              <a:effectLst/>
+              <a:latin typeface="Segoe UI" panose="020B0502040204020203" pitchFamily="34" charset="0"/>
+            </a:endParaRPr>
           </a:p>
         </p:txBody>
       </p:sp>
     </p:spTree>
     <p:extLst>
       <p:ext uri="{BB962C8B-B14F-4D97-AF65-F5344CB8AC3E}">
-        <p14:creationId xmlns:p14="http://schemas.microsoft.com/office/powerpoint/2010/main" val="174335182"/>
+        <p14:creationId xmlns:p14="http://schemas.microsoft.com/office/powerpoint/2010/main" val="3857259330"/>
       </p:ext>
     </p:extLst>
   </p:cSld>
